--- a/02-PROFESORADO/03-PRESENTACIONES/POR-SESION/h6/S288-pruebas-de-persistencia-presentacion.pptx
+++ b/02-PROFESORADO/03-PRESENTACIONES/POR-SESION/h6/S288-pruebas-de-persistencia-presentacion.pptx
@@ -11,6 +11,8 @@
     <p:sldId id="259" r:id="rId10"/>
     <p:sldId id="260" r:id="rId11"/>
     <p:sldId id="261" r:id="rId12"/>
+    <p:sldId id="262" r:id="rId13"/>
+    <p:sldId id="263" r:id="rId14"/>
   </p:sldIdLst>
   <p:sldSz cx="12191695" cy="6858000" type="screen4x3"/>
   <p:notesSz cx="6858000" cy="9144000"/>
@@ -3145,7 +3147,7 @@
         <p:spPr>
           <a:xfrm>
             <a:off x="0" y="0"/>
-            <a:ext cx="228600" cy="6858000"/>
+            <a:ext cx="256032" cy="6858000"/>
           </a:xfrm>
           <a:prstGeom prst="rect">
             <a:avLst/>
@@ -3187,8 +3189,8 @@
         </p:nvSpPr>
         <p:spPr>
           <a:xfrm>
-            <a:off x="640080" y="566928"/>
-            <a:ext cx="1828800" cy="566928"/>
+            <a:off x="658368" y="566928"/>
+            <a:ext cx="1874519" cy="566928"/>
           </a:xfrm>
           <a:prstGeom prst="roundRect">
             <a:avLst/>
@@ -3197,7 +3199,9 @@
             <a:srgbClr val="21597A"/>
           </a:solidFill>
           <a:ln>
-            <a:noFill/>
+            <a:solidFill>
+              <a:srgbClr val="21597A"/>
+            </a:solidFill>
           </a:ln>
         </p:spPr>
         <p:style>
@@ -3230,8 +3234,8 @@
         </p:nvSpPr>
         <p:spPr>
           <a:xfrm>
-            <a:off x="713232" y="676656"/>
-            <a:ext cx="1682496" cy="256032"/>
+            <a:off x="731520" y="685800"/>
+            <a:ext cx="1719072" cy="228600"/>
           </a:xfrm>
           <a:prstGeom prst="rect">
             <a:avLst/>
@@ -3239,7 +3243,7 @@
           <a:noFill/>
         </p:spPr>
         <p:txBody>
-          <a:bodyPr wrap="square" lIns="36576" rIns="36576" tIns="27432" bIns="27432">
+          <a:bodyPr wrap="square" lIns="45720" rIns="45720" tIns="36576" bIns="36576" anchor="t">
             <a:spAutoFit/>
           </a:bodyPr>
           <a:lstStyle/>
@@ -3266,8 +3270,8 @@
         </p:nvSpPr>
         <p:spPr>
           <a:xfrm>
-            <a:off x="658368" y="1536192"/>
-            <a:ext cx="10789920" cy="1645920"/>
+            <a:off x="685800" y="1481328"/>
+            <a:ext cx="10789920" cy="1691640"/>
           </a:xfrm>
           <a:prstGeom prst="rect">
             <a:avLst/>
@@ -3275,7 +3279,7 @@
           <a:noFill/>
         </p:spPr>
         <p:txBody>
-          <a:bodyPr wrap="square" lIns="36576" rIns="36576" tIns="27432" bIns="27432">
+          <a:bodyPr wrap="square" lIns="45720" rIns="45720" tIns="36576" bIns="36576" anchor="t">
             <a:spAutoFit/>
           </a:bodyPr>
           <a:lstStyle/>
@@ -3302,8 +3306,8 @@
         </p:nvSpPr>
         <p:spPr>
           <a:xfrm>
-            <a:off x="685800" y="3822191"/>
-            <a:ext cx="6766560" cy="384048"/>
+            <a:off x="713232" y="3703320"/>
+            <a:ext cx="10424160" cy="411480"/>
           </a:xfrm>
           <a:prstGeom prst="rect">
             <a:avLst/>
@@ -3311,7 +3315,7 @@
           <a:noFill/>
         </p:spPr>
         <p:txBody>
-          <a:bodyPr wrap="square" lIns="36576" rIns="36576" tIns="27432" bIns="27432">
+          <a:bodyPr wrap="square" lIns="45720" rIns="45720" tIns="36576" bIns="36576" anchor="t">
             <a:spAutoFit/>
           </a:bodyPr>
           <a:lstStyle/>
@@ -3325,7 +3329,7 @@
               </a:defRPr>
             </a:pPr>
             <a:r>
-              <a:t>H6  ·  45 minutos</a:t>
+              <a:t>H6 · 45 minutos</a:t>
             </a:r>
           </a:p>
         </p:txBody>
@@ -3338,8 +3342,8 @@
         </p:nvSpPr>
         <p:spPr>
           <a:xfrm>
-            <a:off x="685800" y="5074920"/>
-            <a:ext cx="10241280" cy="640080"/>
+            <a:off x="713232" y="4315968"/>
+            <a:ext cx="10241280" cy="502920"/>
           </a:xfrm>
           <a:prstGeom prst="rect">
             <a:avLst/>
@@ -3347,13 +3351,13 @@
           <a:noFill/>
         </p:spPr>
         <p:txBody>
-          <a:bodyPr wrap="square" lIns="36576" rIns="36576" tIns="27432" bIns="27432">
+          <a:bodyPr wrap="square" lIns="45720" rIns="45720" tIns="36576" bIns="36576" anchor="t">
             <a:spAutoFit/>
           </a:bodyPr>
           <a:lstStyle/>
           <a:p>
             <a:pPr algn="l">
-              <a:defRPr sz="2400" b="0">
+              <a:defRPr sz="1900" b="0">
                 <a:solidFill>
                   <a:srgbClr val="FFFFFF"/>
                 </a:solidFill>
@@ -3361,7 +3365,7 @@
               </a:defRPr>
             </a:pPr>
             <a:r>
-              <a:t>Hoy construiremos una evidencia que puedas comprobar y explicar.</a:t>
+              <a:t>Fase HEXA: Ejecutar — crear</a:t>
             </a:r>
           </a:p>
         </p:txBody>
@@ -3374,7 +3378,7 @@
         </p:nvSpPr>
         <p:spPr>
           <a:xfrm>
-            <a:off x="685800" y="6272784"/>
+            <a:off x="713232" y="6272784"/>
             <a:ext cx="10607040" cy="201168"/>
           </a:xfrm>
           <a:prstGeom prst="rect">
@@ -3383,7 +3387,7 @@
           <a:noFill/>
         </p:spPr>
         <p:txBody>
-          <a:bodyPr wrap="square" lIns="36576" rIns="36576" tIns="27432" bIns="27432">
+          <a:bodyPr wrap="square" lIns="45720" rIns="45720" tIns="36576" bIns="36576" anchor="t">
             <a:spAutoFit/>
           </a:bodyPr>
           <a:lstStyle/>
@@ -3514,8 +3518,8 @@
         </p:nvSpPr>
         <p:spPr>
           <a:xfrm>
-            <a:off x="502920" y="310896"/>
-            <a:ext cx="5029200" cy="256032"/>
+            <a:off x="502920" y="274320"/>
+            <a:ext cx="5486400" cy="256032"/>
           </a:xfrm>
           <a:prstGeom prst="rect">
             <a:avLst/>
@@ -3523,7 +3527,7 @@
           <a:noFill/>
         </p:spPr>
         <p:txBody>
-          <a:bodyPr wrap="square" lIns="36576" rIns="36576" tIns="27432" bIns="27432">
+          <a:bodyPr wrap="square" lIns="45720" rIns="45720" tIns="36576" bIns="36576" anchor="t">
             <a:spAutoFit/>
           </a:bodyPr>
           <a:lstStyle/>
@@ -3550,7 +3554,7 @@
         </p:nvSpPr>
         <p:spPr>
           <a:xfrm>
-            <a:off x="502920" y="621792"/>
+            <a:off x="502920" y="603504"/>
             <a:ext cx="11064240" cy="530352"/>
           </a:xfrm>
           <a:prstGeom prst="rect">
@@ -3559,7 +3563,7 @@
           <a:noFill/>
         </p:spPr>
         <p:txBody>
-          <a:bodyPr wrap="square" lIns="36576" rIns="36576" tIns="27432" bIns="27432">
+          <a:bodyPr wrap="square" lIns="45720" rIns="45720" tIns="36576" bIns="36576" anchor="t">
             <a:spAutoFit/>
           </a:bodyPr>
           <a:lstStyle/>
@@ -3573,7 +3577,7 @@
               </a:defRPr>
             </a:pPr>
             <a:r>
-              <a:t>Qué vamos a conseguir</a:t>
+              <a:t>Qué debe conseguirse</a:t>
             </a:r>
           </a:p>
         </p:txBody>
@@ -3638,7 +3642,7 @@
           <a:noFill/>
         </p:spPr>
         <p:txBody>
-          <a:bodyPr wrap="square" lIns="36576" rIns="36576" tIns="27432" bIns="27432">
+          <a:bodyPr wrap="square" lIns="45720" rIns="45720" tIns="36576" bIns="36576" anchor="t">
             <a:spAutoFit/>
           </a:bodyPr>
           <a:lstStyle/>
@@ -3665,8 +3669,8 @@
         </p:nvSpPr>
         <p:spPr>
           <a:xfrm>
-            <a:off x="594360" y="1417320"/>
-            <a:ext cx="5349240" cy="4343400"/>
+            <a:off x="594360" y="1389888"/>
+            <a:ext cx="5184648" cy="4297680"/>
           </a:xfrm>
           <a:prstGeom prst="roundRect">
             <a:avLst/>
@@ -3676,7 +3680,7 @@
           </a:solidFill>
           <a:ln>
             <a:solidFill>
-              <a:srgbClr val="EBEEF2"/>
+              <a:srgbClr val="E5E9EF"/>
             </a:solidFill>
           </a:ln>
         </p:spPr>
@@ -3711,7 +3715,7 @@
         <p:spPr>
           <a:xfrm>
             <a:off x="822960" y="1618488"/>
-            <a:ext cx="438912" cy="411480"/>
+            <a:ext cx="4727448" cy="3840480"/>
           </a:xfrm>
           <a:prstGeom prst="rect">
             <a:avLst/>
@@ -3719,107 +3723,35 @@
           <a:noFill/>
         </p:spPr>
         <p:txBody>
-          <a:bodyPr wrap="square" lIns="36576" rIns="36576" tIns="27432" bIns="27432">
+          <a:bodyPr wrap="square" lIns="45720" rIns="45720" tIns="36576" bIns="36576" anchor="t">
             <a:spAutoFit/>
           </a:bodyPr>
           <a:lstStyle/>
           <a:p>
-            <a:pPr algn="ctr">
-              <a:defRPr sz="2400" b="1">
-                <a:solidFill>
-                  <a:srgbClr val="21597A"/>
+            <a:pPr algn="l">
+              <a:defRPr sz="2100" b="1">
+                <a:solidFill>
+                  <a:srgbClr val="1C2330"/>
                 </a:solidFill>
                 <a:latin typeface="Aptos"/>
               </a:defRPr>
             </a:pPr>
             <a:r>
-              <a:t>01</a:t>
-            </a:r>
-          </a:p>
-        </p:txBody>
-      </p:sp>
-      <p:sp>
-        <p:nvSpPr>
-          <p:cNvPr id="10" name="TextBox 9"/>
-          <p:cNvSpPr txBox="1"/>
-          <p:nvPr/>
-        </p:nvSpPr>
-        <p:spPr>
-          <a:xfrm>
-            <a:off x="1344168" y="1645920"/>
-            <a:ext cx="4389120" cy="365760"/>
-          </a:xfrm>
-          <a:prstGeom prst="rect">
-            <a:avLst/>
-          </a:prstGeom>
-          <a:noFill/>
-        </p:spPr>
-        <p:txBody>
-          <a:bodyPr wrap="square" lIns="36576" rIns="36576" tIns="27432" bIns="27432">
-            <a:spAutoFit/>
-          </a:bodyPr>
-          <a:lstStyle/>
-          <a:p>
-            <a:pPr algn="l">
-              <a:defRPr sz="1700" b="1">
-                <a:solidFill>
-                  <a:srgbClr val="21597A"/>
-                </a:solidFill>
-                <a:latin typeface="Aptos"/>
-              </a:defRPr>
-            </a:pPr>
-            <a:r>
-              <a:t>Hoy vas a…</a:t>
-            </a:r>
-          </a:p>
-        </p:txBody>
-      </p:sp>
-      <p:sp>
-        <p:nvSpPr>
-          <p:cNvPr id="11" name="TextBox 10"/>
-          <p:cNvSpPr txBox="1"/>
-          <p:nvPr/>
-        </p:nvSpPr>
-        <p:spPr>
-          <a:xfrm>
-            <a:off x="868680" y="2286000"/>
-            <a:ext cx="4800600" cy="3246120"/>
-          </a:xfrm>
-          <a:prstGeom prst="rect">
-            <a:avLst/>
-          </a:prstGeom>
-          <a:noFill/>
-        </p:spPr>
-        <p:txBody>
-          <a:bodyPr wrap="square" lIns="36576" rIns="36576" tIns="27432" bIns="27432">
-            <a:spAutoFit/>
-          </a:bodyPr>
-          <a:lstStyle/>
-          <a:p>
-            <a:pPr algn="l">
-              <a:defRPr sz="2200" b="0">
-                <a:solidFill>
-                  <a:srgbClr val="1C2330"/>
-                </a:solidFill>
-                <a:latin typeface="Aptos"/>
-              </a:defRPr>
-            </a:pPr>
-            <a:r>
-              <a:t>Verificar guardar y cargar.</a:t>
-            </a:r>
-          </a:p>
-        </p:txBody>
-      </p:sp>
-      <p:sp>
-        <p:nvSpPr>
-          <p:cNvPr id="12" name="Rounded Rectangle 11"/>
+              <a:t>Objetivo: Verificar guardar y cargar.</a:t>
+            </a:r>
+          </a:p>
+        </p:txBody>
+      </p:sp>
+      <p:sp>
+        <p:nvSpPr>
+          <p:cNvPr id="10" name="Rounded Rectangle 9"/>
           <p:cNvSpPr/>
           <p:nvPr/>
         </p:nvSpPr>
         <p:spPr>
           <a:xfrm>
-            <a:off x="6236208" y="1417320"/>
-            <a:ext cx="5349240" cy="4343400"/>
+            <a:off x="6035040" y="1389888"/>
+            <a:ext cx="5184648" cy="4297680"/>
           </a:xfrm>
           <a:prstGeom prst="roundRect">
             <a:avLst/>
@@ -3829,7 +3761,7 @@
           </a:solidFill>
           <a:ln>
             <a:solidFill>
-              <a:srgbClr val="EBEEF2"/>
+              <a:srgbClr val="E5E9EF"/>
             </a:solidFill>
           </a:ln>
         </p:spPr>
@@ -3857,14 +3789,14 @@
       </p:sp>
       <p:sp>
         <p:nvSpPr>
-          <p:cNvPr id="13" name="TextBox 12"/>
+          <p:cNvPr id="11" name="TextBox 10"/>
           <p:cNvSpPr txBox="1"/>
           <p:nvPr/>
         </p:nvSpPr>
         <p:spPr>
           <a:xfrm>
-            <a:off x="6464808" y="1618488"/>
-            <a:ext cx="438912" cy="411480"/>
+            <a:off x="6263640" y="1618488"/>
+            <a:ext cx="4727448" cy="3840480"/>
           </a:xfrm>
           <a:prstGeom prst="rect">
             <a:avLst/>
@@ -3872,93 +3804,21 @@
           <a:noFill/>
         </p:spPr>
         <p:txBody>
-          <a:bodyPr wrap="square" lIns="36576" rIns="36576" tIns="27432" bIns="27432">
+          <a:bodyPr wrap="square" lIns="45720" rIns="45720" tIns="36576" bIns="36576" anchor="t">
             <a:spAutoFit/>
           </a:bodyPr>
           <a:lstStyle/>
           <a:p>
-            <a:pPr algn="ctr">
-              <a:defRPr sz="2400" b="1">
-                <a:solidFill>
-                  <a:srgbClr val="21597A"/>
+            <a:pPr algn="l">
+              <a:defRPr sz="2100" b="1">
+                <a:solidFill>
+                  <a:srgbClr val="1C2330"/>
                 </a:solidFill>
                 <a:latin typeface="Aptos"/>
               </a:defRPr>
             </a:pPr>
             <a:r>
-              <a:t>02</a:t>
-            </a:r>
-          </a:p>
-        </p:txBody>
-      </p:sp>
-      <p:sp>
-        <p:nvSpPr>
-          <p:cNvPr id="14" name="TextBox 13"/>
-          <p:cNvSpPr txBox="1"/>
-          <p:nvPr/>
-        </p:nvSpPr>
-        <p:spPr>
-          <a:xfrm>
-            <a:off x="6986016" y="1645920"/>
-            <a:ext cx="4389120" cy="365760"/>
-          </a:xfrm>
-          <a:prstGeom prst="rect">
-            <a:avLst/>
-          </a:prstGeom>
-          <a:noFill/>
-        </p:spPr>
-        <p:txBody>
-          <a:bodyPr wrap="square" lIns="36576" rIns="36576" tIns="27432" bIns="27432">
-            <a:spAutoFit/>
-          </a:bodyPr>
-          <a:lstStyle/>
-          <a:p>
-            <a:pPr algn="l">
-              <a:defRPr sz="1700" b="1">
-                <a:solidFill>
-                  <a:srgbClr val="21597A"/>
-                </a:solidFill>
-                <a:latin typeface="Aptos"/>
-              </a:defRPr>
-            </a:pPr>
-            <a:r>
-              <a:t>Debe quedar…</a:t>
-            </a:r>
-          </a:p>
-        </p:txBody>
-      </p:sp>
-      <p:sp>
-        <p:nvSpPr>
-          <p:cNvPr id="15" name="TextBox 14"/>
-          <p:cNvSpPr txBox="1"/>
-          <p:nvPr/>
-        </p:nvSpPr>
-        <p:spPr>
-          <a:xfrm>
-            <a:off x="6510528" y="2286000"/>
-            <a:ext cx="4800600" cy="3246120"/>
-          </a:xfrm>
-          <a:prstGeom prst="rect">
-            <a:avLst/>
-          </a:prstGeom>
-          <a:noFill/>
-        </p:spPr>
-        <p:txBody>
-          <a:bodyPr wrap="square" lIns="36576" rIns="36576" tIns="27432" bIns="27432">
-            <a:spAutoFit/>
-          </a:bodyPr>
-          <a:lstStyle/>
-          <a:p>
-            <a:pPr algn="l">
-              <a:defRPr sz="2200" b="0">
-                <a:solidFill>
-                  <a:srgbClr val="1C2330"/>
-                </a:solidFill>
-                <a:latin typeface="Aptos"/>
-              </a:defRPr>
-            </a:pPr>
-            <a:r>
-              <a:t>docs/pruebas-persistencia-h6.</a:t>
+              <a:t>Evidencia: docs/pruebas-persistencia-h6.md.</a:t>
             </a:r>
           </a:p>
         </p:txBody>
@@ -4075,8 +3935,8 @@
         </p:nvSpPr>
         <p:spPr>
           <a:xfrm>
-            <a:off x="502920" y="310896"/>
-            <a:ext cx="5029200" cy="256032"/>
+            <a:off x="502920" y="274320"/>
+            <a:ext cx="5486400" cy="256032"/>
           </a:xfrm>
           <a:prstGeom prst="rect">
             <a:avLst/>
@@ -4084,7 +3944,7 @@
           <a:noFill/>
         </p:spPr>
         <p:txBody>
-          <a:bodyPr wrap="square" lIns="36576" rIns="36576" tIns="27432" bIns="27432">
+          <a:bodyPr wrap="square" lIns="45720" rIns="45720" tIns="36576" bIns="36576" anchor="t">
             <a:spAutoFit/>
           </a:bodyPr>
           <a:lstStyle/>
@@ -4098,7 +3958,7 @@
               </a:defRPr>
             </a:pPr>
             <a:r>
-              <a:t>PASO A PASO</a:t>
+              <a:t>RITMO DE LA SESIÓN</a:t>
             </a:r>
           </a:p>
         </p:txBody>
@@ -4111,7 +3971,7 @@
         </p:nvSpPr>
         <p:spPr>
           <a:xfrm>
-            <a:off x="502920" y="621792"/>
+            <a:off x="502920" y="603504"/>
             <a:ext cx="11064240" cy="530352"/>
           </a:xfrm>
           <a:prstGeom prst="rect">
@@ -4120,7 +3980,7 @@
           <a:noFill/>
         </p:spPr>
         <p:txBody>
-          <a:bodyPr wrap="square" lIns="36576" rIns="36576" tIns="27432" bIns="27432">
+          <a:bodyPr wrap="square" lIns="45720" rIns="45720" tIns="36576" bIns="36576" anchor="t">
             <a:spAutoFit/>
           </a:bodyPr>
           <a:lstStyle/>
@@ -4134,7 +3994,7 @@
               </a:defRPr>
             </a:pPr>
             <a:r>
-              <a:t>Ruta de trabajo</a:t>
+              <a:t>Secuencia de aula</a:t>
             </a:r>
           </a:p>
         </p:txBody>
@@ -4199,7 +4059,7 @@
           <a:noFill/>
         </p:spPr>
         <p:txBody>
-          <a:bodyPr wrap="square" lIns="36576" rIns="36576" tIns="27432" bIns="27432">
+          <a:bodyPr wrap="square" lIns="45720" rIns="45720" tIns="36576" bIns="36576" anchor="t">
             <a:spAutoFit/>
           </a:bodyPr>
           <a:lstStyle/>
@@ -4226,8 +4086,8 @@
         </p:nvSpPr>
         <p:spPr>
           <a:xfrm>
-            <a:off x="685800" y="1325880"/>
-            <a:ext cx="502920" cy="502920"/>
+            <a:off x="658368" y="1280160"/>
+            <a:ext cx="475488" cy="475488"/>
           </a:xfrm>
           <a:prstGeom prst="ellipse">
             <a:avLst/>
@@ -4269,8 +4129,8 @@
         </p:nvSpPr>
         <p:spPr>
           <a:xfrm>
-            <a:off x="685800" y="1435607"/>
-            <a:ext cx="502920" cy="201168"/>
+            <a:off x="658368" y="1380744"/>
+            <a:ext cx="475488" cy="201168"/>
           </a:xfrm>
           <a:prstGeom prst="rect">
             <a:avLst/>
@@ -4278,13 +4138,13 @@
           <a:noFill/>
         </p:spPr>
         <p:txBody>
-          <a:bodyPr wrap="square" lIns="36576" rIns="36576" tIns="27432" bIns="27432">
+          <a:bodyPr wrap="square" lIns="45720" rIns="45720" tIns="36576" bIns="36576" anchor="t">
             <a:spAutoFit/>
           </a:bodyPr>
           <a:lstStyle/>
           <a:p>
             <a:pPr algn="ctr">
-              <a:defRPr sz="1400" b="1">
+              <a:defRPr sz="1300" b="1">
                 <a:solidFill>
                   <a:srgbClr val="FFFFFF"/>
                 </a:solidFill>
@@ -4305,8 +4165,8 @@
         </p:nvSpPr>
         <p:spPr>
           <a:xfrm>
-            <a:off x="1417320" y="1344168"/>
-            <a:ext cx="9875520" cy="548640"/>
+            <a:off x="1389888" y="1261872"/>
+            <a:ext cx="10058400" cy="772668"/>
           </a:xfrm>
           <a:prstGeom prst="rect">
             <a:avLst/>
@@ -4314,13 +4174,13 @@
           <a:noFill/>
         </p:spPr>
         <p:txBody>
-          <a:bodyPr wrap="square" lIns="36576" rIns="36576" tIns="27432" bIns="27432">
+          <a:bodyPr wrap="square" lIns="45720" rIns="45720" tIns="36576" bIns="36576" anchor="t">
             <a:spAutoFit/>
           </a:bodyPr>
           <a:lstStyle/>
           <a:p>
             <a:pPr algn="l">
-              <a:defRPr sz="2000" b="0">
+              <a:defRPr sz="1400" b="0">
                 <a:solidFill>
                   <a:srgbClr val="1C2330"/>
                 </a:solidFill>
@@ -4328,7 +4188,7 @@
               </a:defRPr>
             </a:pPr>
             <a:r>
-              <a:t>Lee el objetivo y escribe con tus palabras qué debe quedar terminado.</a:t>
+              <a:t>0–5 min — Presentar objetivo, producto y evidencia de hoy.</a:t>
             </a:r>
           </a:p>
         </p:txBody>
@@ -4341,8 +4201,8 @@
         </p:nvSpPr>
         <p:spPr>
           <a:xfrm>
-            <a:off x="685800" y="2258568"/>
-            <a:ext cx="502920" cy="502920"/>
+            <a:off x="658368" y="2125979"/>
+            <a:ext cx="475488" cy="475488"/>
           </a:xfrm>
           <a:prstGeom prst="ellipse">
             <a:avLst/>
@@ -4384,8 +4244,8 @@
         </p:nvSpPr>
         <p:spPr>
           <a:xfrm>
-            <a:off x="685800" y="2368296"/>
-            <a:ext cx="502920" cy="201168"/>
+            <a:off x="658368" y="2226563"/>
+            <a:ext cx="475488" cy="201168"/>
           </a:xfrm>
           <a:prstGeom prst="rect">
             <a:avLst/>
@@ -4393,13 +4253,13 @@
           <a:noFill/>
         </p:spPr>
         <p:txBody>
-          <a:bodyPr wrap="square" lIns="36576" rIns="36576" tIns="27432" bIns="27432">
+          <a:bodyPr wrap="square" lIns="45720" rIns="45720" tIns="36576" bIns="36576" anchor="t">
             <a:spAutoFit/>
           </a:bodyPr>
           <a:lstStyle/>
           <a:p>
             <a:pPr algn="ctr">
-              <a:defRPr sz="1400" b="1">
+              <a:defRPr sz="1300" b="1">
                 <a:solidFill>
                   <a:srgbClr val="FFFFFF"/>
                 </a:solidFill>
@@ -4420,8 +4280,8 @@
         </p:nvSpPr>
         <p:spPr>
           <a:xfrm>
-            <a:off x="1417320" y="2276856"/>
-            <a:ext cx="9875520" cy="548640"/>
+            <a:off x="1389888" y="2107691"/>
+            <a:ext cx="10058400" cy="772668"/>
           </a:xfrm>
           <a:prstGeom prst="rect">
             <a:avLst/>
@@ -4429,13 +4289,13 @@
           <a:noFill/>
         </p:spPr>
         <p:txBody>
-          <a:bodyPr wrap="square" lIns="36576" rIns="36576" tIns="27432" bIns="27432">
+          <a:bodyPr wrap="square" lIns="45720" rIns="45720" tIns="36576" bIns="36576" anchor="t">
             <a:spAutoFit/>
           </a:bodyPr>
           <a:lstStyle/>
           <a:p>
             <a:pPr algn="l">
-              <a:defRPr sz="2000" b="0">
+              <a:defRPr sz="1400" b="0">
                 <a:solidFill>
                   <a:srgbClr val="1C2330"/>
                 </a:solidFill>
@@ -4443,7 +4303,7 @@
               </a:defRPr>
             </a:pPr>
             <a:r>
-              <a:t>Atiende al ejemplo breve y anota una predicción, duda o decisión.</a:t>
+              <a:t>5–13 min — Explicación breve: La prueba clave es segunda ejecución: guardar, cerrar, abrir, consultar.</a:t>
             </a:r>
           </a:p>
         </p:txBody>
@@ -4456,8 +4316,8 @@
         </p:nvSpPr>
         <p:spPr>
           <a:xfrm>
-            <a:off x="685800" y="3191256"/>
-            <a:ext cx="502920" cy="502920"/>
+            <a:off x="658368" y="2971799"/>
+            <a:ext cx="475488" cy="475488"/>
           </a:xfrm>
           <a:prstGeom prst="ellipse">
             <a:avLst/>
@@ -4499,8 +4359,8 @@
         </p:nvSpPr>
         <p:spPr>
           <a:xfrm>
-            <a:off x="685800" y="3300984"/>
-            <a:ext cx="502920" cy="201168"/>
+            <a:off x="658368" y="3072383"/>
+            <a:ext cx="475488" cy="201168"/>
           </a:xfrm>
           <a:prstGeom prst="rect">
             <a:avLst/>
@@ -4508,13 +4368,13 @@
           <a:noFill/>
         </p:spPr>
         <p:txBody>
-          <a:bodyPr wrap="square" lIns="36576" rIns="36576" tIns="27432" bIns="27432">
+          <a:bodyPr wrap="square" lIns="45720" rIns="45720" tIns="36576" bIns="36576" anchor="t">
             <a:spAutoFit/>
           </a:bodyPr>
           <a:lstStyle/>
           <a:p>
             <a:pPr algn="ctr">
-              <a:defRPr sz="1400" b="1">
+              <a:defRPr sz="1300" b="1">
                 <a:solidFill>
                   <a:srgbClr val="FFFFFF"/>
                 </a:solidFill>
@@ -4535,8 +4395,8 @@
         </p:nvSpPr>
         <p:spPr>
           <a:xfrm>
-            <a:off x="1417320" y="3209544"/>
-            <a:ext cx="9875520" cy="548640"/>
+            <a:off x="1389888" y="2953511"/>
+            <a:ext cx="10058400" cy="772668"/>
           </a:xfrm>
           <a:prstGeom prst="rect">
             <a:avLst/>
@@ -4544,13 +4404,13 @@
           <a:noFill/>
         </p:spPr>
         <p:txBody>
-          <a:bodyPr wrap="square" lIns="36576" rIns="36576" tIns="27432" bIns="27432">
+          <a:bodyPr wrap="square" lIns="45720" rIns="45720" tIns="36576" bIns="36576" anchor="t">
             <a:spAutoFit/>
           </a:bodyPr>
           <a:lstStyle/>
           <a:p>
             <a:pPr algn="l">
-              <a:defRPr sz="2000" b="0">
+              <a:defRPr sz="1400" b="0">
                 <a:solidFill>
                   <a:srgbClr val="1C2330"/>
                 </a:solidFill>
@@ -4558,7 +4418,7 @@
               </a:defRPr>
             </a:pPr>
             <a:r>
-              <a:t>Realiza esta tarea: Completar pruebas: guardar, cerrar, abrir, consultar, fichero vacío y error.</a:t>
+              <a:t>13–18 min — Demostración o ejemplo: Ejecutar prueba completa.</a:t>
             </a:r>
           </a:p>
         </p:txBody>
@@ -4571,8 +4431,8 @@
         </p:nvSpPr>
         <p:spPr>
           <a:xfrm>
-            <a:off x="685800" y="4123944"/>
-            <a:ext cx="502920" cy="502920"/>
+            <a:off x="658368" y="3817620"/>
+            <a:ext cx="475488" cy="475488"/>
           </a:xfrm>
           <a:prstGeom prst="ellipse">
             <a:avLst/>
@@ -4614,8 +4474,8 @@
         </p:nvSpPr>
         <p:spPr>
           <a:xfrm>
-            <a:off x="685800" y="4233672"/>
-            <a:ext cx="502920" cy="201168"/>
+            <a:off x="658368" y="3918204"/>
+            <a:ext cx="475488" cy="201168"/>
           </a:xfrm>
           <a:prstGeom prst="rect">
             <a:avLst/>
@@ -4623,13 +4483,13 @@
           <a:noFill/>
         </p:spPr>
         <p:txBody>
-          <a:bodyPr wrap="square" lIns="36576" rIns="36576" tIns="27432" bIns="27432">
+          <a:bodyPr wrap="square" lIns="45720" rIns="45720" tIns="36576" bIns="36576" anchor="t">
             <a:spAutoFit/>
           </a:bodyPr>
           <a:lstStyle/>
           <a:p>
             <a:pPr algn="ctr">
-              <a:defRPr sz="1400" b="1">
+              <a:defRPr sz="1300" b="1">
                 <a:solidFill>
                   <a:srgbClr val="FFFFFF"/>
                 </a:solidFill>
@@ -4650,8 +4510,8 @@
         </p:nvSpPr>
         <p:spPr>
           <a:xfrm>
-            <a:off x="1417320" y="4142231"/>
-            <a:ext cx="9875520" cy="548640"/>
+            <a:off x="1389888" y="3799332"/>
+            <a:ext cx="10058400" cy="772668"/>
           </a:xfrm>
           <a:prstGeom prst="rect">
             <a:avLst/>
@@ -4659,13 +4519,13 @@
           <a:noFill/>
         </p:spPr>
         <p:txBody>
-          <a:bodyPr wrap="square" lIns="36576" rIns="36576" tIns="27432" bIns="27432">
+          <a:bodyPr wrap="square" lIns="45720" rIns="45720" tIns="36576" bIns="36576" anchor="t">
             <a:spAutoFit/>
           </a:bodyPr>
           <a:lstStyle/>
           <a:p>
             <a:pPr algn="l">
-              <a:defRPr sz="2000" b="0">
+              <a:defRPr sz="1400" b="0">
                 <a:solidFill>
                   <a:srgbClr val="1C2330"/>
                 </a:solidFill>
@@ -4673,7 +4533,7 @@
               </a:defRPr>
             </a:pPr>
             <a:r>
-              <a:t>Comprueba el resultado con una prueba observable; no basta con decir “funciona”.</a:t>
+              <a:t>18–35 min — Trabajo del alumnado: Completar pruebas: guardar, cerrar, abrir, consultar, fichero vacío y error.</a:t>
             </a:r>
           </a:p>
         </p:txBody>
@@ -4686,8 +4546,8 @@
         </p:nvSpPr>
         <p:spPr>
           <a:xfrm>
-            <a:off x="685800" y="5056631"/>
-            <a:ext cx="502920" cy="502920"/>
+            <a:off x="658368" y="4663440"/>
+            <a:ext cx="475488" cy="475488"/>
           </a:xfrm>
           <a:prstGeom prst="ellipse">
             <a:avLst/>
@@ -4729,8 +4589,8 @@
         </p:nvSpPr>
         <p:spPr>
           <a:xfrm>
-            <a:off x="685800" y="5166359"/>
-            <a:ext cx="502920" cy="201168"/>
+            <a:off x="658368" y="4764024"/>
+            <a:ext cx="475488" cy="201168"/>
           </a:xfrm>
           <a:prstGeom prst="rect">
             <a:avLst/>
@@ -4738,13 +4598,13 @@
           <a:noFill/>
         </p:spPr>
         <p:txBody>
-          <a:bodyPr wrap="square" lIns="36576" rIns="36576" tIns="27432" bIns="27432">
+          <a:bodyPr wrap="square" lIns="45720" rIns="45720" tIns="36576" bIns="36576" anchor="t">
             <a:spAutoFit/>
           </a:bodyPr>
           <a:lstStyle/>
           <a:p>
             <a:pPr algn="ctr">
-              <a:defRPr sz="1400" b="1">
+              <a:defRPr sz="1300" b="1">
                 <a:solidFill>
                   <a:srgbClr val="FFFFFF"/>
                 </a:solidFill>
@@ -4765,8 +4625,8 @@
         </p:nvSpPr>
         <p:spPr>
           <a:xfrm>
-            <a:off x="1417320" y="5074919"/>
-            <a:ext cx="9875520" cy="548640"/>
+            <a:off x="1389888" y="4645152"/>
+            <a:ext cx="10058400" cy="772668"/>
           </a:xfrm>
           <a:prstGeom prst="rect">
             <a:avLst/>
@@ -4774,13 +4634,13 @@
           <a:noFill/>
         </p:spPr>
         <p:txBody>
-          <a:bodyPr wrap="square" lIns="36576" rIns="36576" tIns="27432" bIns="27432">
+          <a:bodyPr wrap="square" lIns="45720" rIns="45720" tIns="36576" bIns="36576" anchor="t">
             <a:spAutoFit/>
           </a:bodyPr>
           <a:lstStyle/>
           <a:p>
             <a:pPr algn="l">
-              <a:defRPr sz="2000" b="0">
+              <a:defRPr sz="1400" b="0">
                 <a:solidFill>
                   <a:srgbClr val="1C2330"/>
                 </a:solidFill>
@@ -4788,7 +4648,122 @@
               </a:defRPr>
             </a:pPr>
             <a:r>
-              <a:t>Guarda o entrega la evidencia indicada y prepárate para explicarla.</a:t>
+              <a:t>35–40 min — Comprobar la evidencia con una explicación o prueba breve.</a:t>
+            </a:r>
+          </a:p>
+        </p:txBody>
+      </p:sp>
+      <p:sp>
+        <p:nvSpPr>
+          <p:cNvPr id="23" name="Oval 22"/>
+          <p:cNvSpPr/>
+          <p:nvPr/>
+        </p:nvSpPr>
+        <p:spPr>
+          <a:xfrm>
+            <a:off x="658368" y="5509259"/>
+            <a:ext cx="475488" cy="475488"/>
+          </a:xfrm>
+          <a:prstGeom prst="ellipse">
+            <a:avLst/>
+          </a:prstGeom>
+          <a:solidFill>
+            <a:srgbClr val="21597A"/>
+          </a:solidFill>
+          <a:ln>
+            <a:noFill/>
+          </a:ln>
+        </p:spPr>
+        <p:style>
+          <a:lnRef idx="1">
+            <a:schemeClr val="accent1"/>
+          </a:lnRef>
+          <a:fillRef idx="3">
+            <a:schemeClr val="accent1"/>
+          </a:fillRef>
+          <a:effectRef idx="2">
+            <a:schemeClr val="accent1"/>
+          </a:effectRef>
+          <a:fontRef idx="minor">
+            <a:schemeClr val="lt1"/>
+          </a:fontRef>
+        </p:style>
+        <p:txBody>
+          <a:bodyPr rtlCol="0" anchor="ctr"/>
+          <a:lstStyle/>
+          <a:p>
+            <a:pPr algn="ctr"/>
+          </a:p>
+        </p:txBody>
+      </p:sp>
+      <p:sp>
+        <p:nvSpPr>
+          <p:cNvPr id="24" name="TextBox 23"/>
+          <p:cNvSpPr txBox="1"/>
+          <p:nvPr/>
+        </p:nvSpPr>
+        <p:spPr>
+          <a:xfrm>
+            <a:off x="658368" y="5609844"/>
+            <a:ext cx="475488" cy="201168"/>
+          </a:xfrm>
+          <a:prstGeom prst="rect">
+            <a:avLst/>
+          </a:prstGeom>
+          <a:noFill/>
+        </p:spPr>
+        <p:txBody>
+          <a:bodyPr wrap="square" lIns="45720" rIns="45720" tIns="36576" bIns="36576" anchor="t">
+            <a:spAutoFit/>
+          </a:bodyPr>
+          <a:lstStyle/>
+          <a:p>
+            <a:pPr algn="ctr">
+              <a:defRPr sz="1300" b="1">
+                <a:solidFill>
+                  <a:srgbClr val="FFFFFF"/>
+                </a:solidFill>
+                <a:latin typeface="Aptos"/>
+              </a:defRPr>
+            </a:pPr>
+            <a:r>
+              <a:t>6</a:t>
+            </a:r>
+          </a:p>
+        </p:txBody>
+      </p:sp>
+      <p:sp>
+        <p:nvSpPr>
+          <p:cNvPr id="25" name="TextBox 24"/>
+          <p:cNvSpPr txBox="1"/>
+          <p:nvPr/>
+        </p:nvSpPr>
+        <p:spPr>
+          <a:xfrm>
+            <a:off x="1389888" y="5490972"/>
+            <a:ext cx="10058400" cy="772668"/>
+          </a:xfrm>
+          <a:prstGeom prst="rect">
+            <a:avLst/>
+          </a:prstGeom>
+          <a:noFill/>
+        </p:spPr>
+        <p:txBody>
+          <a:bodyPr wrap="square" lIns="45720" rIns="45720" tIns="36576" bIns="36576" anchor="t">
+            <a:spAutoFit/>
+          </a:bodyPr>
+          <a:lstStyle/>
+          <a:p>
+            <a:pPr algn="l">
+              <a:defRPr sz="1400" b="0">
+                <a:solidFill>
+                  <a:srgbClr val="1C2330"/>
+                </a:solidFill>
+                <a:latin typeface="Aptos"/>
+              </a:defRPr>
+            </a:pPr>
+            <a:r>
+              <a:t>40–45 min — Cierre: Ejecutar prueba completa delante del docente o de otro equipo.</a:t>
             </a:r>
           </a:p>
         </p:txBody>
@@ -4905,8 +4880,8 @@
         </p:nvSpPr>
         <p:spPr>
           <a:xfrm>
-            <a:off x="502920" y="310896"/>
-            <a:ext cx="5029200" cy="256032"/>
+            <a:off x="502920" y="274320"/>
+            <a:ext cx="5486400" cy="256032"/>
           </a:xfrm>
           <a:prstGeom prst="rect">
             <a:avLst/>
@@ -4914,7 +4889,7 @@
           <a:noFill/>
         </p:spPr>
         <p:txBody>
-          <a:bodyPr wrap="square" lIns="36576" rIns="36576" tIns="27432" bIns="27432">
+          <a:bodyPr wrap="square" lIns="45720" rIns="45720" tIns="36576" bIns="36576" anchor="t">
             <a:spAutoFit/>
           </a:bodyPr>
           <a:lstStyle/>
@@ -4928,7 +4903,7 @@
               </a:defRPr>
             </a:pPr>
             <a:r>
-              <a:t>COMPRENDER Y APLICAR</a:t>
+              <a:t>COMPRENDER Y TRANSFERIR</a:t>
             </a:r>
           </a:p>
         </p:txBody>
@@ -4941,7 +4916,7 @@
         </p:nvSpPr>
         <p:spPr>
           <a:xfrm>
-            <a:off x="502920" y="621792"/>
+            <a:off x="502920" y="603504"/>
             <a:ext cx="11064240" cy="530352"/>
           </a:xfrm>
           <a:prstGeom prst="rect">
@@ -4950,7 +4925,7 @@
           <a:noFill/>
         </p:spPr>
         <p:txBody>
-          <a:bodyPr wrap="square" lIns="36576" rIns="36576" tIns="27432" bIns="27432">
+          <a:bodyPr wrap="square" lIns="45720" rIns="45720" tIns="36576" bIns="36576" anchor="t">
             <a:spAutoFit/>
           </a:bodyPr>
           <a:lstStyle/>
@@ -4964,7 +4939,7 @@
               </a:defRPr>
             </a:pPr>
             <a:r>
-              <a:t>Claves para avanzar</a:t>
+              <a:t>Idea clave y puesta en práctica</a:t>
             </a:r>
           </a:p>
         </p:txBody>
@@ -5029,7 +5004,7 @@
           <a:noFill/>
         </p:spPr>
         <p:txBody>
-          <a:bodyPr wrap="square" lIns="36576" rIns="36576" tIns="27432" bIns="27432">
+          <a:bodyPr wrap="square" lIns="45720" rIns="45720" tIns="36576" bIns="36576" anchor="t">
             <a:spAutoFit/>
           </a:bodyPr>
           <a:lstStyle/>
@@ -5056,8 +5031,8 @@
         </p:nvSpPr>
         <p:spPr>
           <a:xfrm>
-            <a:off x="594360" y="1325880"/>
-            <a:ext cx="5257800" cy="4526280"/>
+            <a:off x="621792" y="1325880"/>
+            <a:ext cx="5285232" cy="4736592"/>
           </a:xfrm>
           <a:prstGeom prst="roundRect">
             <a:avLst/>
@@ -5067,7 +5042,7 @@
           </a:solidFill>
           <a:ln>
             <a:solidFill>
-              <a:srgbClr val="EBEEF2"/>
+              <a:srgbClr val="E5E9EF"/>
             </a:solidFill>
           </a:ln>
         </p:spPr>
@@ -5095,25 +5070,98 @@
       </p:sp>
       <p:sp>
         <p:nvSpPr>
-          <p:cNvPr id="9" name="Rounded Rectangle 8"/>
+          <p:cNvPr id="9" name="TextBox 8"/>
+          <p:cNvSpPr txBox="1"/>
+          <p:nvPr/>
+        </p:nvSpPr>
+        <p:spPr>
+          <a:xfrm>
+            <a:off x="932688" y="1627632"/>
+            <a:ext cx="2011680" cy="329184"/>
+          </a:xfrm>
+          <a:prstGeom prst="rect">
+            <a:avLst/>
+          </a:prstGeom>
+          <a:noFill/>
+        </p:spPr>
+        <p:txBody>
+          <a:bodyPr wrap="square" lIns="45720" rIns="45720" tIns="36576" bIns="36576" anchor="t">
+            <a:spAutoFit/>
+          </a:bodyPr>
+          <a:lstStyle/>
+          <a:p>
+            <a:pPr algn="l">
+              <a:defRPr sz="1300" b="1">
+                <a:solidFill>
+                  <a:srgbClr val="21597A"/>
+                </a:solidFill>
+                <a:latin typeface="Aptos"/>
+              </a:defRPr>
+            </a:pPr>
+            <a:r>
+              <a:t>IDEA CLAVE</a:t>
+            </a:r>
+          </a:p>
+        </p:txBody>
+      </p:sp>
+      <p:sp>
+        <p:nvSpPr>
+          <p:cNvPr id="10" name="TextBox 9"/>
+          <p:cNvSpPr txBox="1"/>
+          <p:nvPr/>
+        </p:nvSpPr>
+        <p:spPr>
+          <a:xfrm>
+            <a:off x="932688" y="2176272"/>
+            <a:ext cx="4617720" cy="3429000"/>
+          </a:xfrm>
+          <a:prstGeom prst="rect">
+            <a:avLst/>
+          </a:prstGeom>
+          <a:noFill/>
+        </p:spPr>
+        <p:txBody>
+          <a:bodyPr wrap="square" lIns="73152" rIns="45720" tIns="36576">
+            <a:spAutoFit/>
+          </a:bodyPr>
+          <a:lstStyle/>
+          <a:p>
+            <a:pPr>
+              <a:spcAft>
+                <a:spcPts val="900"/>
+              </a:spcAft>
+              <a:defRPr sz="2300">
+                <a:solidFill>
+                  <a:srgbClr val="1C2330"/>
+                </a:solidFill>
+                <a:latin typeface="Aptos"/>
+              </a:defRPr>
+            </a:pPr>
+            <a:r>
+              <a:t>•  La prueba clave de persistencia exige segunda ejecución.</a:t>
+            </a:r>
+          </a:p>
+        </p:txBody>
+      </p:sp>
+      <p:sp>
+        <p:nvSpPr>
+          <p:cNvPr id="11" name="Rounded Rectangle 10"/>
           <p:cNvSpPr/>
           <p:nvPr/>
         </p:nvSpPr>
         <p:spPr>
           <a:xfrm>
             <a:off x="6172200" y="1325880"/>
-            <a:ext cx="5413248" cy="4526280"/>
+            <a:ext cx="5394960" cy="4736592"/>
           </a:xfrm>
           <a:prstGeom prst="roundRect">
             <a:avLst/>
           </a:prstGeom>
           <a:solidFill>
-            <a:srgbClr val="FFFFFF"/>
+            <a:srgbClr val="121824"/>
           </a:solidFill>
           <a:ln>
-            <a:solidFill>
-              <a:srgbClr val="EBEEF2"/>
-            </a:solidFill>
+            <a:noFill/>
           </a:ln>
         </p:spPr>
         <p:style>
@@ -5140,14 +5188,14 @@
       </p:sp>
       <p:sp>
         <p:nvSpPr>
-          <p:cNvPr id="10" name="TextBox 9"/>
+          <p:cNvPr id="12" name="TextBox 11"/>
           <p:cNvSpPr txBox="1"/>
           <p:nvPr/>
         </p:nvSpPr>
         <p:spPr>
           <a:xfrm>
-            <a:off x="868680" y="1600200"/>
-            <a:ext cx="4663440" cy="365760"/>
+            <a:off x="6492240" y="1627632"/>
+            <a:ext cx="2194560" cy="329184"/>
           </a:xfrm>
           <a:prstGeom prst="rect">
             <a:avLst/>
@@ -5155,13 +5203,13 @@
           <a:noFill/>
         </p:spPr>
         <p:txBody>
-          <a:bodyPr wrap="square" lIns="36576" rIns="36576" tIns="27432" bIns="27432">
+          <a:bodyPr wrap="square" lIns="45720" rIns="45720" tIns="36576" bIns="36576" anchor="t">
             <a:spAutoFit/>
           </a:bodyPr>
           <a:lstStyle/>
           <a:p>
             <a:pPr algn="l">
-              <a:defRPr sz="1600" b="1">
+              <a:defRPr sz="1300" b="1">
                 <a:solidFill>
                   <a:srgbClr val="21597A"/>
                 </a:solidFill>
@@ -5169,21 +5217,21 @@
               </a:defRPr>
             </a:pPr>
             <a:r>
-              <a:t>IDEAS CLAVE</a:t>
-            </a:r>
-          </a:p>
-        </p:txBody>
-      </p:sp>
-      <p:sp>
-        <p:nvSpPr>
-          <p:cNvPr id="11" name="TextBox 10"/>
+              <a:t>EN PRÁCTICA</a:t>
+            </a:r>
+          </a:p>
+        </p:txBody>
+      </p:sp>
+      <p:sp>
+        <p:nvSpPr>
+          <p:cNvPr id="13" name="TextBox 12"/>
           <p:cNvSpPr txBox="1"/>
           <p:nvPr/>
         </p:nvSpPr>
         <p:spPr>
           <a:xfrm>
-            <a:off x="868680" y="2121408"/>
-            <a:ext cx="4572000" cy="3337560"/>
+            <a:off x="6492240" y="2176272"/>
+            <a:ext cx="4617720" cy="3429000"/>
           </a:xfrm>
           <a:prstGeom prst="rect">
             <a:avLst/>
@@ -5198,118 +5246,11 @@
           <a:p>
             <a:pPr>
               <a:spcAft>
-                <a:spcPts val="1000"/>
+                <a:spcPts val="900"/>
               </a:spcAft>
-              <a:defRPr sz="1800">
-                <a:solidFill>
-                  <a:srgbClr val="1C2330"/>
-                </a:solidFill>
-                <a:latin typeface="Aptos"/>
-              </a:defRPr>
-            </a:pPr>
-            <a:r>
-              <a:t>•  La prueba clave de persistencia exige segunda ejecución.</a:t>
-            </a:r>
-          </a:p>
-          <a:p>
-            <a:pPr>
-              <a:spcAft>
-                <a:spcPts val="1000"/>
-              </a:spcAft>
-              <a:defRPr sz="1800">
-                <a:solidFill>
-                  <a:srgbClr val="1C2330"/>
-                </a:solidFill>
-                <a:latin typeface="Aptos"/>
-              </a:defRPr>
-            </a:pPr>
-            <a:r>
-              <a:t>•  Guion breve sugerido:</a:t>
-            </a:r>
-          </a:p>
-          <a:p>
-            <a:pPr>
-              <a:spcAft>
-                <a:spcPts val="1000"/>
-              </a:spcAft>
-              <a:defRPr sz="1800">
-                <a:solidFill>
-                  <a:srgbClr val="1C2330"/>
-                </a:solidFill>
-                <a:latin typeface="Aptos"/>
-              </a:defRPr>
-            </a:pPr>
-            <a:r>
-              <a:t>•  &gt; Hoy necesitamos comprender y practicar lo justo para producir una evidencia verificable. Primero observaremos un ejemplo, después trabajaréis y al final cada pers…</a:t>
-            </a:r>
-          </a:p>
-        </p:txBody>
-      </p:sp>
-      <p:sp>
-        <p:nvSpPr>
-          <p:cNvPr id="12" name="TextBox 11"/>
-          <p:cNvSpPr txBox="1"/>
-          <p:nvPr/>
-        </p:nvSpPr>
-        <p:spPr>
-          <a:xfrm>
-            <a:off x="6446520" y="1600200"/>
-            <a:ext cx="4572000" cy="365760"/>
-          </a:xfrm>
-          <a:prstGeom prst="rect">
-            <a:avLst/>
-          </a:prstGeom>
-          <a:noFill/>
-        </p:spPr>
-        <p:txBody>
-          <a:bodyPr wrap="square" lIns="36576" rIns="36576" tIns="27432" bIns="27432">
-            <a:spAutoFit/>
-          </a:bodyPr>
-          <a:lstStyle/>
-          <a:p>
-            <a:pPr algn="l">
-              <a:defRPr sz="1600" b="1">
-                <a:solidFill>
-                  <a:srgbClr val="21597A"/>
-                </a:solidFill>
-                <a:latin typeface="Aptos"/>
-              </a:defRPr>
-            </a:pPr>
-            <a:r>
-              <a:t>ACTIVIDAD CENTRAL</a:t>
-            </a:r>
-          </a:p>
-        </p:txBody>
-      </p:sp>
-      <p:sp>
-        <p:nvSpPr>
-          <p:cNvPr id="13" name="TextBox 12"/>
-          <p:cNvSpPr txBox="1"/>
-          <p:nvPr/>
-        </p:nvSpPr>
-        <p:spPr>
-          <a:xfrm>
-            <a:off x="6446520" y="2121408"/>
-            <a:ext cx="4617720" cy="3337560"/>
-          </a:xfrm>
-          <a:prstGeom prst="rect">
-            <a:avLst/>
-          </a:prstGeom>
-          <a:noFill/>
-        </p:spPr>
-        <p:txBody>
-          <a:bodyPr wrap="square" lIns="73152" rIns="45720" tIns="36576">
-            <a:spAutoFit/>
-          </a:bodyPr>
-          <a:lstStyle/>
-          <a:p>
-            <a:pPr>
-              <a:spcAft>
-                <a:spcPts val="1000"/>
-              </a:spcAft>
-              <a:defRPr sz="1800">
-                <a:solidFill>
-                  <a:srgbClr val="1C2330"/>
+              <a:defRPr sz="2300">
+                <a:solidFill>
+                  <a:srgbClr val="FFFFFF"/>
                 </a:solidFill>
                 <a:latin typeface="Aptos"/>
               </a:defRPr>
@@ -5432,8 +5373,8 @@
         </p:nvSpPr>
         <p:spPr>
           <a:xfrm>
-            <a:off x="502920" y="310896"/>
-            <a:ext cx="5029200" cy="256032"/>
+            <a:off x="502920" y="274320"/>
+            <a:ext cx="5486400" cy="256032"/>
           </a:xfrm>
           <a:prstGeom prst="rect">
             <a:avLst/>
@@ -5441,7 +5382,7 @@
           <a:noFill/>
         </p:spPr>
         <p:txBody>
-          <a:bodyPr wrap="square" lIns="36576" rIns="36576" tIns="27432" bIns="27432">
+          <a:bodyPr wrap="square" lIns="45720" rIns="45720" tIns="36576" bIns="36576" anchor="t">
             <a:spAutoFit/>
           </a:bodyPr>
           <a:lstStyle/>
@@ -5455,7 +5396,7 @@
               </a:defRPr>
             </a:pPr>
             <a:r>
-              <a:t>EVIDENCIA MÍNIMA</a:t>
+              <a:t>APLICAR Y DECIDIR</a:t>
             </a:r>
           </a:p>
         </p:txBody>
@@ -5468,7 +5409,7 @@
         </p:nvSpPr>
         <p:spPr>
           <a:xfrm>
-            <a:off x="502920" y="621792"/>
+            <a:off x="502920" y="603504"/>
             <a:ext cx="11064240" cy="530352"/>
           </a:xfrm>
           <a:prstGeom prst="rect">
@@ -5477,7 +5418,7 @@
           <a:noFill/>
         </p:spPr>
         <p:txBody>
-          <a:bodyPr wrap="square" lIns="36576" rIns="36576" tIns="27432" bIns="27432">
+          <a:bodyPr wrap="square" lIns="45720" rIns="45720" tIns="36576" bIns="36576" anchor="t">
             <a:spAutoFit/>
           </a:bodyPr>
           <a:lstStyle/>
@@ -5491,7 +5432,7 @@
               </a:defRPr>
             </a:pPr>
             <a:r>
-              <a:t>Antes de salir, comprueba</a:t>
+              <a:t>Actividad central</a:t>
             </a:r>
           </a:p>
         </p:txBody>
@@ -5556,7 +5497,7 @@
           <a:noFill/>
         </p:spPr>
         <p:txBody>
-          <a:bodyPr wrap="square" lIns="36576" rIns="36576" tIns="27432" bIns="27432">
+          <a:bodyPr wrap="square" lIns="45720" rIns="45720" tIns="36576" bIns="36576" anchor="t">
             <a:spAutoFit/>
           </a:bodyPr>
           <a:lstStyle/>
@@ -5583,8 +5524,8 @@
         </p:nvSpPr>
         <p:spPr>
           <a:xfrm>
-            <a:off x="713232" y="1371600"/>
-            <a:ext cx="420624" cy="420624"/>
+            <a:off x="658368" y="1307592"/>
+            <a:ext cx="10835640" cy="2226564"/>
           </a:xfrm>
           <a:prstGeom prst="roundRect">
             <a:avLst/>
@@ -5594,7 +5535,7 @@
           </a:solidFill>
           <a:ln>
             <a:solidFill>
-              <a:srgbClr val="21597A"/>
+              <a:srgbClr val="E5E9EF"/>
             </a:solidFill>
           </a:ln>
         </p:spPr>
@@ -5628,8 +5569,8 @@
         </p:nvSpPr>
         <p:spPr>
           <a:xfrm>
-            <a:off x="1389888" y="1362456"/>
-            <a:ext cx="9784080" cy="594360"/>
+            <a:off x="850392" y="1453895"/>
+            <a:ext cx="685800" cy="384048"/>
           </a:xfrm>
           <a:prstGeom prst="rect">
             <a:avLst/>
@@ -5637,12 +5578,48 @@
           <a:noFill/>
         </p:spPr>
         <p:txBody>
-          <a:bodyPr wrap="square" lIns="36576" rIns="36576" tIns="27432" bIns="27432">
+          <a:bodyPr wrap="square" lIns="45720" rIns="45720" tIns="36576" bIns="36576" anchor="t">
             <a:spAutoFit/>
           </a:bodyPr>
           <a:lstStyle/>
           <a:p>
             <a:pPr algn="l">
+              <a:defRPr sz="1200" b="1">
+                <a:solidFill>
+                  <a:srgbClr val="21597A"/>
+                </a:solidFill>
+                <a:latin typeface="Aptos"/>
+              </a:defRPr>
+            </a:pPr>
+            <a:r>
+              <a:t>PASO 1</a:t>
+            </a:r>
+          </a:p>
+        </p:txBody>
+      </p:sp>
+      <p:sp>
+        <p:nvSpPr>
+          <p:cNvPr id="10" name="TextBox 9"/>
+          <p:cNvSpPr txBox="1"/>
+          <p:nvPr/>
+        </p:nvSpPr>
+        <p:spPr>
+          <a:xfrm>
+            <a:off x="1664208" y="1417319"/>
+            <a:ext cx="9464040" cy="2007108"/>
+          </a:xfrm>
+          <a:prstGeom prst="rect">
+            <a:avLst/>
+          </a:prstGeom>
+          <a:noFill/>
+        </p:spPr>
+        <p:txBody>
+          <a:bodyPr wrap="square" lIns="45720" rIns="45720" tIns="36576" bIns="36576" anchor="t">
+            <a:spAutoFit/>
+          </a:bodyPr>
+          <a:lstStyle/>
+          <a:p>
+            <a:pPr algn="l">
               <a:defRPr sz="2000" b="0">
                 <a:solidFill>
                   <a:srgbClr val="1C2330"/>
@@ -5651,21 +5628,21 @@
               </a:defRPr>
             </a:pPr>
             <a:r>
-              <a:t>He producido o actualizado: docs/pruebas-persistencia-h6.</a:t>
-            </a:r>
-          </a:p>
-        </p:txBody>
-      </p:sp>
-      <p:sp>
-        <p:nvSpPr>
-          <p:cNvPr id="10" name="Rounded Rectangle 9"/>
+              <a:t>Completar pruebas H6.</a:t>
+            </a:r>
+          </a:p>
+        </p:txBody>
+      </p:sp>
+      <p:sp>
+        <p:nvSpPr>
+          <p:cNvPr id="11" name="Rounded Rectangle 10"/>
           <p:cNvSpPr/>
           <p:nvPr/>
         </p:nvSpPr>
         <p:spPr>
           <a:xfrm>
-            <a:off x="713232" y="2267712"/>
-            <a:ext cx="420624" cy="420624"/>
+            <a:off x="658368" y="3776472"/>
+            <a:ext cx="10835640" cy="2226564"/>
           </a:xfrm>
           <a:prstGeom prst="roundRect">
             <a:avLst/>
@@ -5675,7 +5652,7 @@
           </a:solidFill>
           <a:ln>
             <a:solidFill>
-              <a:srgbClr val="21597A"/>
+              <a:srgbClr val="E5E9EF"/>
             </a:solidFill>
           </a:ln>
         </p:spPr>
@@ -5703,14 +5680,14 @@
       </p:sp>
       <p:sp>
         <p:nvSpPr>
-          <p:cNvPr id="11" name="TextBox 10"/>
+          <p:cNvPr id="12" name="TextBox 11"/>
           <p:cNvSpPr txBox="1"/>
           <p:nvPr/>
         </p:nvSpPr>
         <p:spPr>
           <a:xfrm>
-            <a:off x="1389888" y="2258568"/>
-            <a:ext cx="9784080" cy="594360"/>
+            <a:off x="850392" y="3922776"/>
+            <a:ext cx="685800" cy="384048"/>
           </a:xfrm>
           <a:prstGeom prst="rect">
             <a:avLst/>
@@ -5718,67 +5695,22 @@
           <a:noFill/>
         </p:spPr>
         <p:txBody>
-          <a:bodyPr wrap="square" lIns="36576" rIns="36576" tIns="27432" bIns="27432">
+          <a:bodyPr wrap="square" lIns="45720" rIns="45720" tIns="36576" bIns="36576" anchor="t">
             <a:spAutoFit/>
           </a:bodyPr>
           <a:lstStyle/>
           <a:p>
             <a:pPr algn="l">
-              <a:defRPr sz="2000" b="0">
-                <a:solidFill>
-                  <a:srgbClr val="1C2330"/>
+              <a:defRPr sz="1200" b="1">
+                <a:solidFill>
+                  <a:srgbClr val="21597A"/>
                 </a:solidFill>
                 <a:latin typeface="Aptos"/>
               </a:defRPr>
             </a:pPr>
             <a:r>
-              <a:t>Puedo señalar dónde está.</a:t>
-            </a:r>
-          </a:p>
-        </p:txBody>
-      </p:sp>
-      <p:sp>
-        <p:nvSpPr>
-          <p:cNvPr id="12" name="Rounded Rectangle 11"/>
-          <p:cNvSpPr/>
-          <p:nvPr/>
-        </p:nvSpPr>
-        <p:spPr>
-          <a:xfrm>
-            <a:off x="713232" y="3163824"/>
-            <a:ext cx="420624" cy="420624"/>
-          </a:xfrm>
-          <a:prstGeom prst="roundRect">
-            <a:avLst/>
-          </a:prstGeom>
-          <a:solidFill>
-            <a:srgbClr val="FFFFFF"/>
-          </a:solidFill>
-          <a:ln>
-            <a:solidFill>
-              <a:srgbClr val="21597A"/>
-            </a:solidFill>
-          </a:ln>
-        </p:spPr>
-        <p:style>
-          <a:lnRef idx="1">
-            <a:schemeClr val="accent1"/>
-          </a:lnRef>
-          <a:fillRef idx="3">
-            <a:schemeClr val="accent1"/>
-          </a:fillRef>
-          <a:effectRef idx="2">
-            <a:schemeClr val="accent1"/>
-          </a:effectRef>
-          <a:fontRef idx="minor">
-            <a:schemeClr val="lt1"/>
-          </a:fontRef>
-        </p:style>
-        <p:txBody>
-          <a:bodyPr rtlCol="0" anchor="ctr"/>
-          <a:lstStyle/>
-          <a:p>
-            <a:pPr algn="ctr"/>
+              <a:t>PASO 2</a:t>
+            </a:r>
           </a:p>
         </p:txBody>
       </p:sp>
@@ -5790,8 +5722,8 @@
         </p:nvSpPr>
         <p:spPr>
           <a:xfrm>
-            <a:off x="1389888" y="3154680"/>
-            <a:ext cx="9784080" cy="594360"/>
+            <a:off x="1664208" y="3886200"/>
+            <a:ext cx="9464040" cy="2007108"/>
           </a:xfrm>
           <a:prstGeom prst="rect">
             <a:avLst/>
@@ -5799,7 +5731,7 @@
           <a:noFill/>
         </p:spPr>
         <p:txBody>
-          <a:bodyPr wrap="square" lIns="36576" rIns="36576" tIns="27432" bIns="27432">
+          <a:bodyPr wrap="square" lIns="45720" rIns="45720" tIns="36576" bIns="36576" anchor="t">
             <a:spAutoFit/>
           </a:bodyPr>
           <a:lstStyle/>
@@ -5813,205 +5745,7 @@
               </a:defRPr>
             </a:pPr>
             <a:r>
-              <a:t>Puedo explicar una decisión tomada.</a:t>
-            </a:r>
-          </a:p>
-        </p:txBody>
-      </p:sp>
-      <p:sp>
-        <p:nvSpPr>
-          <p:cNvPr id="14" name="Rounded Rectangle 13"/>
-          <p:cNvSpPr/>
-          <p:nvPr/>
-        </p:nvSpPr>
-        <p:spPr>
-          <a:xfrm>
-            <a:off x="713232" y="4059935"/>
-            <a:ext cx="420624" cy="420624"/>
-          </a:xfrm>
-          <a:prstGeom prst="roundRect">
-            <a:avLst/>
-          </a:prstGeom>
-          <a:solidFill>
-            <a:srgbClr val="FFFFFF"/>
-          </a:solidFill>
-          <a:ln>
-            <a:solidFill>
-              <a:srgbClr val="21597A"/>
-            </a:solidFill>
-          </a:ln>
-        </p:spPr>
-        <p:style>
-          <a:lnRef idx="1">
-            <a:schemeClr val="accent1"/>
-          </a:lnRef>
-          <a:fillRef idx="3">
-            <a:schemeClr val="accent1"/>
-          </a:fillRef>
-          <a:effectRef idx="2">
-            <a:schemeClr val="accent1"/>
-          </a:effectRef>
-          <a:fontRef idx="minor">
-            <a:schemeClr val="lt1"/>
-          </a:fontRef>
-        </p:style>
-        <p:txBody>
-          <a:bodyPr rtlCol="0" anchor="ctr"/>
-          <a:lstStyle/>
-          <a:p>
-            <a:pPr algn="ctr"/>
-          </a:p>
-        </p:txBody>
-      </p:sp>
-      <p:sp>
-        <p:nvSpPr>
-          <p:cNvPr id="15" name="TextBox 14"/>
-          <p:cNvSpPr txBox="1"/>
-          <p:nvPr/>
-        </p:nvSpPr>
-        <p:spPr>
-          <a:xfrm>
-            <a:off x="1389888" y="4050791"/>
-            <a:ext cx="9784080" cy="594360"/>
-          </a:xfrm>
-          <a:prstGeom prst="rect">
-            <a:avLst/>
-          </a:prstGeom>
-          <a:noFill/>
-        </p:spPr>
-        <p:txBody>
-          <a:bodyPr wrap="square" lIns="36576" rIns="36576" tIns="27432" bIns="27432">
-            <a:spAutoFit/>
-          </a:bodyPr>
-          <a:lstStyle/>
-          <a:p>
-            <a:pPr algn="l">
-              <a:defRPr sz="2000" b="0">
-                <a:solidFill>
-                  <a:srgbClr val="1C2330"/>
-                </a:solidFill>
-                <a:latin typeface="Aptos"/>
-              </a:defRPr>
-            </a:pPr>
-            <a:r>
-              <a:t>Puedo mostrar una prueba o comprobación.</a:t>
-            </a:r>
-          </a:p>
-        </p:txBody>
-      </p:sp>
-      <p:sp>
-        <p:nvSpPr>
-          <p:cNvPr id="16" name="Rounded Rectangle 15"/>
-          <p:cNvSpPr/>
-          <p:nvPr/>
-        </p:nvSpPr>
-        <p:spPr>
-          <a:xfrm>
-            <a:off x="713232" y="4956048"/>
-            <a:ext cx="420624" cy="420624"/>
-          </a:xfrm>
-          <a:prstGeom prst="roundRect">
-            <a:avLst/>
-          </a:prstGeom>
-          <a:solidFill>
-            <a:srgbClr val="FFFFFF"/>
-          </a:solidFill>
-          <a:ln>
-            <a:solidFill>
-              <a:srgbClr val="21597A"/>
-            </a:solidFill>
-          </a:ln>
-        </p:spPr>
-        <p:style>
-          <a:lnRef idx="1">
-            <a:schemeClr val="accent1"/>
-          </a:lnRef>
-          <a:fillRef idx="3">
-            <a:schemeClr val="accent1"/>
-          </a:fillRef>
-          <a:effectRef idx="2">
-            <a:schemeClr val="accent1"/>
-          </a:effectRef>
-          <a:fontRef idx="minor">
-            <a:schemeClr val="lt1"/>
-          </a:fontRef>
-        </p:style>
-        <p:txBody>
-          <a:bodyPr rtlCol="0" anchor="ctr"/>
-          <a:lstStyle/>
-          <a:p>
-            <a:pPr algn="ctr"/>
-          </a:p>
-        </p:txBody>
-      </p:sp>
-      <p:sp>
-        <p:nvSpPr>
-          <p:cNvPr id="17" name="TextBox 16"/>
-          <p:cNvSpPr txBox="1"/>
-          <p:nvPr/>
-        </p:nvSpPr>
-        <p:spPr>
-          <a:xfrm>
-            <a:off x="1389888" y="4946904"/>
-            <a:ext cx="9784080" cy="594360"/>
-          </a:xfrm>
-          <a:prstGeom prst="rect">
-            <a:avLst/>
-          </a:prstGeom>
-          <a:noFill/>
-        </p:spPr>
-        <p:txBody>
-          <a:bodyPr wrap="square" lIns="36576" rIns="36576" tIns="27432" bIns="27432">
-            <a:spAutoFit/>
-          </a:bodyPr>
-          <a:lstStyle/>
-          <a:p>
-            <a:pPr algn="l">
-              <a:defRPr sz="2000" b="0">
-                <a:solidFill>
-                  <a:srgbClr val="1C2330"/>
-                </a:solidFill>
-                <a:latin typeface="Aptos"/>
-              </a:defRPr>
-            </a:pPr>
-            <a:r>
-              <a:t>He registrado mi aportación individual si el trabajo era de equipo.</a:t>
-            </a:r>
-          </a:p>
-        </p:txBody>
-      </p:sp>
-      <p:sp>
-        <p:nvSpPr>
-          <p:cNvPr id="18" name="TextBox 17"/>
-          <p:cNvSpPr txBox="1"/>
-          <p:nvPr/>
-        </p:nvSpPr>
-        <p:spPr>
-          <a:xfrm>
-            <a:off x="731520" y="5925312"/>
-            <a:ext cx="10789920" cy="274320"/>
-          </a:xfrm>
-          <a:prstGeom prst="rect">
-            <a:avLst/>
-          </a:prstGeom>
-          <a:noFill/>
-        </p:spPr>
-        <p:txBody>
-          <a:bodyPr wrap="square" lIns="36576" rIns="36576" tIns="27432" bIns="27432">
-            <a:spAutoFit/>
-          </a:bodyPr>
-          <a:lstStyle/>
-          <a:p>
-            <a:pPr algn="l">
-              <a:defRPr sz="1200" b="0">
-                <a:solidFill>
-                  <a:srgbClr val="586270"/>
-                </a:solidFill>
-                <a:latin typeface="Aptos"/>
-              </a:defRPr>
-            </a:pPr>
-            <a:r>
-              <a:t>Necesitas: Un ordenador por estudiante o pareja, con JDK e IntelliJ disponibles y el proyecto del hito accesible. · Datos ficticios de prueba. No se usarán contraseñas, tokens, claves API ni datos personales reales.</a:t>
+              <a:t>Comprueba y registra la evidencia: docs/pruebas-persistencia-h6.md.</a:t>
             </a:r>
           </a:p>
         </p:txBody>
@@ -6128,8 +5862,8 @@
         </p:nvSpPr>
         <p:spPr>
           <a:xfrm>
-            <a:off x="502920" y="310896"/>
-            <a:ext cx="5029200" cy="256032"/>
+            <a:off x="502920" y="274320"/>
+            <a:ext cx="5486400" cy="256032"/>
           </a:xfrm>
           <a:prstGeom prst="rect">
             <a:avLst/>
@@ -6137,7 +5871,7 @@
           <a:noFill/>
         </p:spPr>
         <p:txBody>
-          <a:bodyPr wrap="square" lIns="36576" rIns="36576" tIns="27432" bIns="27432">
+          <a:bodyPr wrap="square" lIns="45720" rIns="45720" tIns="36576" bIns="36576" anchor="t">
             <a:spAutoFit/>
           </a:bodyPr>
           <a:lstStyle/>
@@ -6151,7 +5885,7 @@
               </a:defRPr>
             </a:pPr>
             <a:r>
-              <a:t>COMPRUEBA Y EXPLICA</a:t>
+              <a:t>COMPROBAR</a:t>
             </a:r>
           </a:p>
         </p:txBody>
@@ -6164,7 +5898,7 @@
         </p:nvSpPr>
         <p:spPr>
           <a:xfrm>
-            <a:off x="502920" y="621792"/>
+            <a:off x="502920" y="603504"/>
             <a:ext cx="11064240" cy="530352"/>
           </a:xfrm>
           <a:prstGeom prst="rect">
@@ -6173,7 +5907,7 @@
           <a:noFill/>
         </p:spPr>
         <p:txBody>
-          <a:bodyPr wrap="square" lIns="36576" rIns="36576" tIns="27432" bIns="27432">
+          <a:bodyPr wrap="square" lIns="45720" rIns="45720" tIns="36576" bIns="36576" anchor="t">
             <a:spAutoFit/>
           </a:bodyPr>
           <a:lstStyle/>
@@ -6187,7 +5921,7 @@
               </a:defRPr>
             </a:pPr>
             <a:r>
-              <a:t>Cierre de la sesión</a:t>
+              <a:t>Evidencia y comprobación</a:t>
             </a:r>
           </a:p>
         </p:txBody>
@@ -6252,7 +5986,7 @@
           <a:noFill/>
         </p:spPr>
         <p:txBody>
-          <a:bodyPr wrap="square" lIns="36576" rIns="36576" tIns="27432" bIns="27432">
+          <a:bodyPr wrap="square" lIns="45720" rIns="45720" tIns="36576" bIns="36576" anchor="t">
             <a:spAutoFit/>
           </a:bodyPr>
           <a:lstStyle/>
@@ -6279,10 +6013,476 @@
         </p:nvSpPr>
         <p:spPr>
           <a:xfrm>
-            <a:off x="621792" y="1298448"/>
-            <a:ext cx="10927080" cy="1965960"/>
+            <a:off x="713232" y="1298448"/>
+            <a:ext cx="420624" cy="420624"/>
           </a:xfrm>
           <a:prstGeom prst="roundRect">
+            <a:avLst/>
+          </a:prstGeom>
+          <a:solidFill>
+            <a:srgbClr val="FFFFFF"/>
+          </a:solidFill>
+          <a:ln>
+            <a:solidFill>
+              <a:srgbClr val="21597A"/>
+            </a:solidFill>
+          </a:ln>
+        </p:spPr>
+        <p:style>
+          <a:lnRef idx="1">
+            <a:schemeClr val="accent1"/>
+          </a:lnRef>
+          <a:fillRef idx="3">
+            <a:schemeClr val="accent1"/>
+          </a:fillRef>
+          <a:effectRef idx="2">
+            <a:schemeClr val="accent1"/>
+          </a:effectRef>
+          <a:fontRef idx="minor">
+            <a:schemeClr val="lt1"/>
+          </a:fontRef>
+        </p:style>
+        <p:txBody>
+          <a:bodyPr rtlCol="0" anchor="ctr"/>
+          <a:lstStyle/>
+          <a:p>
+            <a:pPr algn="ctr"/>
+          </a:p>
+        </p:txBody>
+      </p:sp>
+      <p:sp>
+        <p:nvSpPr>
+          <p:cNvPr id="9" name="TextBox 8"/>
+          <p:cNvSpPr txBox="1"/>
+          <p:nvPr/>
+        </p:nvSpPr>
+        <p:spPr>
+          <a:xfrm>
+            <a:off x="1389888" y="1280160"/>
+            <a:ext cx="9829800" cy="960120"/>
+          </a:xfrm>
+          <a:prstGeom prst="rect">
+            <a:avLst/>
+          </a:prstGeom>
+          <a:noFill/>
+        </p:spPr>
+        <p:txBody>
+          <a:bodyPr wrap="square" lIns="45720" rIns="45720" tIns="36576" bIns="36576" anchor="t">
+            <a:spAutoFit/>
+          </a:bodyPr>
+          <a:lstStyle/>
+          <a:p>
+            <a:pPr algn="l">
+              <a:defRPr sz="1900" b="0">
+                <a:solidFill>
+                  <a:srgbClr val="1C2330"/>
+                </a:solidFill>
+                <a:latin typeface="Aptos"/>
+              </a:defRPr>
+            </a:pPr>
+            <a:r>
+              <a:t>He producido o actualizado: docs/pruebas-persistencia-h6.</a:t>
+            </a:r>
+          </a:p>
+        </p:txBody>
+      </p:sp>
+      <p:sp>
+        <p:nvSpPr>
+          <p:cNvPr id="10" name="Rounded Rectangle 9"/>
+          <p:cNvSpPr/>
+          <p:nvPr/>
+        </p:nvSpPr>
+        <p:spPr>
+          <a:xfrm>
+            <a:off x="713232" y="2295144"/>
+            <a:ext cx="420624" cy="420624"/>
+          </a:xfrm>
+          <a:prstGeom prst="roundRect">
+            <a:avLst/>
+          </a:prstGeom>
+          <a:solidFill>
+            <a:srgbClr val="FFFFFF"/>
+          </a:solidFill>
+          <a:ln>
+            <a:solidFill>
+              <a:srgbClr val="21597A"/>
+            </a:solidFill>
+          </a:ln>
+        </p:spPr>
+        <p:style>
+          <a:lnRef idx="1">
+            <a:schemeClr val="accent1"/>
+          </a:lnRef>
+          <a:fillRef idx="3">
+            <a:schemeClr val="accent1"/>
+          </a:fillRef>
+          <a:effectRef idx="2">
+            <a:schemeClr val="accent1"/>
+          </a:effectRef>
+          <a:fontRef idx="minor">
+            <a:schemeClr val="lt1"/>
+          </a:fontRef>
+        </p:style>
+        <p:txBody>
+          <a:bodyPr rtlCol="0" anchor="ctr"/>
+          <a:lstStyle/>
+          <a:p>
+            <a:pPr algn="ctr"/>
+          </a:p>
+        </p:txBody>
+      </p:sp>
+      <p:sp>
+        <p:nvSpPr>
+          <p:cNvPr id="11" name="TextBox 10"/>
+          <p:cNvSpPr txBox="1"/>
+          <p:nvPr/>
+        </p:nvSpPr>
+        <p:spPr>
+          <a:xfrm>
+            <a:off x="1389888" y="2276856"/>
+            <a:ext cx="9829800" cy="960120"/>
+          </a:xfrm>
+          <a:prstGeom prst="rect">
+            <a:avLst/>
+          </a:prstGeom>
+          <a:noFill/>
+        </p:spPr>
+        <p:txBody>
+          <a:bodyPr wrap="square" lIns="45720" rIns="45720" tIns="36576" bIns="36576" anchor="t">
+            <a:spAutoFit/>
+          </a:bodyPr>
+          <a:lstStyle/>
+          <a:p>
+            <a:pPr algn="l">
+              <a:defRPr sz="1900" b="0">
+                <a:solidFill>
+                  <a:srgbClr val="1C2330"/>
+                </a:solidFill>
+                <a:latin typeface="Aptos"/>
+              </a:defRPr>
+            </a:pPr>
+            <a:r>
+              <a:t>Puedo señalar dónde está.</a:t>
+            </a:r>
+          </a:p>
+        </p:txBody>
+      </p:sp>
+      <p:sp>
+        <p:nvSpPr>
+          <p:cNvPr id="12" name="Rounded Rectangle 11"/>
+          <p:cNvSpPr/>
+          <p:nvPr/>
+        </p:nvSpPr>
+        <p:spPr>
+          <a:xfrm>
+            <a:off x="713232" y="3291839"/>
+            <a:ext cx="420624" cy="420624"/>
+          </a:xfrm>
+          <a:prstGeom prst="roundRect">
+            <a:avLst/>
+          </a:prstGeom>
+          <a:solidFill>
+            <a:srgbClr val="FFFFFF"/>
+          </a:solidFill>
+          <a:ln>
+            <a:solidFill>
+              <a:srgbClr val="21597A"/>
+            </a:solidFill>
+          </a:ln>
+        </p:spPr>
+        <p:style>
+          <a:lnRef idx="1">
+            <a:schemeClr val="accent1"/>
+          </a:lnRef>
+          <a:fillRef idx="3">
+            <a:schemeClr val="accent1"/>
+          </a:fillRef>
+          <a:effectRef idx="2">
+            <a:schemeClr val="accent1"/>
+          </a:effectRef>
+          <a:fontRef idx="minor">
+            <a:schemeClr val="lt1"/>
+          </a:fontRef>
+        </p:style>
+        <p:txBody>
+          <a:bodyPr rtlCol="0" anchor="ctr"/>
+          <a:lstStyle/>
+          <a:p>
+            <a:pPr algn="ctr"/>
+          </a:p>
+        </p:txBody>
+      </p:sp>
+      <p:sp>
+        <p:nvSpPr>
+          <p:cNvPr id="13" name="TextBox 12"/>
+          <p:cNvSpPr txBox="1"/>
+          <p:nvPr/>
+        </p:nvSpPr>
+        <p:spPr>
+          <a:xfrm>
+            <a:off x="1389888" y="3273551"/>
+            <a:ext cx="9829800" cy="960120"/>
+          </a:xfrm>
+          <a:prstGeom prst="rect">
+            <a:avLst/>
+          </a:prstGeom>
+          <a:noFill/>
+        </p:spPr>
+        <p:txBody>
+          <a:bodyPr wrap="square" lIns="45720" rIns="45720" tIns="36576" bIns="36576" anchor="t">
+            <a:spAutoFit/>
+          </a:bodyPr>
+          <a:lstStyle/>
+          <a:p>
+            <a:pPr algn="l">
+              <a:defRPr sz="1900" b="0">
+                <a:solidFill>
+                  <a:srgbClr val="1C2330"/>
+                </a:solidFill>
+                <a:latin typeface="Aptos"/>
+              </a:defRPr>
+            </a:pPr>
+            <a:r>
+              <a:t>Puedo explicar una decisión tomada.</a:t>
+            </a:r>
+          </a:p>
+        </p:txBody>
+      </p:sp>
+      <p:sp>
+        <p:nvSpPr>
+          <p:cNvPr id="14" name="Rounded Rectangle 13"/>
+          <p:cNvSpPr/>
+          <p:nvPr/>
+        </p:nvSpPr>
+        <p:spPr>
+          <a:xfrm>
+            <a:off x="713232" y="4288536"/>
+            <a:ext cx="420624" cy="420624"/>
+          </a:xfrm>
+          <a:prstGeom prst="roundRect">
+            <a:avLst/>
+          </a:prstGeom>
+          <a:solidFill>
+            <a:srgbClr val="FFFFFF"/>
+          </a:solidFill>
+          <a:ln>
+            <a:solidFill>
+              <a:srgbClr val="21597A"/>
+            </a:solidFill>
+          </a:ln>
+        </p:spPr>
+        <p:style>
+          <a:lnRef idx="1">
+            <a:schemeClr val="accent1"/>
+          </a:lnRef>
+          <a:fillRef idx="3">
+            <a:schemeClr val="accent1"/>
+          </a:fillRef>
+          <a:effectRef idx="2">
+            <a:schemeClr val="accent1"/>
+          </a:effectRef>
+          <a:fontRef idx="minor">
+            <a:schemeClr val="lt1"/>
+          </a:fontRef>
+        </p:style>
+        <p:txBody>
+          <a:bodyPr rtlCol="0" anchor="ctr"/>
+          <a:lstStyle/>
+          <a:p>
+            <a:pPr algn="ctr"/>
+          </a:p>
+        </p:txBody>
+      </p:sp>
+      <p:sp>
+        <p:nvSpPr>
+          <p:cNvPr id="15" name="TextBox 14"/>
+          <p:cNvSpPr txBox="1"/>
+          <p:nvPr/>
+        </p:nvSpPr>
+        <p:spPr>
+          <a:xfrm>
+            <a:off x="1389888" y="4270248"/>
+            <a:ext cx="9829800" cy="960120"/>
+          </a:xfrm>
+          <a:prstGeom prst="rect">
+            <a:avLst/>
+          </a:prstGeom>
+          <a:noFill/>
+        </p:spPr>
+        <p:txBody>
+          <a:bodyPr wrap="square" lIns="45720" rIns="45720" tIns="36576" bIns="36576" anchor="t">
+            <a:spAutoFit/>
+          </a:bodyPr>
+          <a:lstStyle/>
+          <a:p>
+            <a:pPr algn="l">
+              <a:defRPr sz="1900" b="0">
+                <a:solidFill>
+                  <a:srgbClr val="1C2330"/>
+                </a:solidFill>
+                <a:latin typeface="Aptos"/>
+              </a:defRPr>
+            </a:pPr>
+            <a:r>
+              <a:t>Puedo mostrar una prueba o comprobación.</a:t>
+            </a:r>
+          </a:p>
+        </p:txBody>
+      </p:sp>
+      <p:sp>
+        <p:nvSpPr>
+          <p:cNvPr id="16" name="Rounded Rectangle 15"/>
+          <p:cNvSpPr/>
+          <p:nvPr/>
+        </p:nvSpPr>
+        <p:spPr>
+          <a:xfrm>
+            <a:off x="713232" y="5285231"/>
+            <a:ext cx="420624" cy="420624"/>
+          </a:xfrm>
+          <a:prstGeom prst="roundRect">
+            <a:avLst/>
+          </a:prstGeom>
+          <a:solidFill>
+            <a:srgbClr val="FFFFFF"/>
+          </a:solidFill>
+          <a:ln>
+            <a:solidFill>
+              <a:srgbClr val="21597A"/>
+            </a:solidFill>
+          </a:ln>
+        </p:spPr>
+        <p:style>
+          <a:lnRef idx="1">
+            <a:schemeClr val="accent1"/>
+          </a:lnRef>
+          <a:fillRef idx="3">
+            <a:schemeClr val="accent1"/>
+          </a:fillRef>
+          <a:effectRef idx="2">
+            <a:schemeClr val="accent1"/>
+          </a:effectRef>
+          <a:fontRef idx="minor">
+            <a:schemeClr val="lt1"/>
+          </a:fontRef>
+        </p:style>
+        <p:txBody>
+          <a:bodyPr rtlCol="0" anchor="ctr"/>
+          <a:lstStyle/>
+          <a:p>
+            <a:pPr algn="ctr"/>
+          </a:p>
+        </p:txBody>
+      </p:sp>
+      <p:sp>
+        <p:nvSpPr>
+          <p:cNvPr id="17" name="TextBox 16"/>
+          <p:cNvSpPr txBox="1"/>
+          <p:nvPr/>
+        </p:nvSpPr>
+        <p:spPr>
+          <a:xfrm>
+            <a:off x="1389888" y="5266944"/>
+            <a:ext cx="9829800" cy="960120"/>
+          </a:xfrm>
+          <a:prstGeom prst="rect">
+            <a:avLst/>
+          </a:prstGeom>
+          <a:noFill/>
+        </p:spPr>
+        <p:txBody>
+          <a:bodyPr wrap="square" lIns="45720" rIns="45720" tIns="36576" bIns="36576" anchor="t">
+            <a:spAutoFit/>
+          </a:bodyPr>
+          <a:lstStyle/>
+          <a:p>
+            <a:pPr algn="l">
+              <a:defRPr sz="1900" b="0">
+                <a:solidFill>
+                  <a:srgbClr val="1C2330"/>
+                </a:solidFill>
+                <a:latin typeface="Aptos"/>
+              </a:defRPr>
+            </a:pPr>
+            <a:r>
+              <a:t>He registrado mi aportación individual si el trabajo era de equipo.</a:t>
+            </a:r>
+          </a:p>
+        </p:txBody>
+      </p:sp>
+    </p:spTree>
+  </p:cSld>
+  <p:clrMapOvr>
+    <a:masterClrMapping/>
+  </p:clrMapOvr>
+</p:sld>
+</file>
+
+<file path=ppt/slides/slide7.xml><?xml version="1.0" encoding="utf-8"?>
+<p:sld xmlns:a="http://schemas.openxmlformats.org/drawingml/2006/main" xmlns:p="http://schemas.openxmlformats.org/presentationml/2006/main" xmlns:r="http://schemas.openxmlformats.org/officeDocument/2006/relationships">
+  <p:cSld>
+    <p:spTree>
+      <p:nvGrpSpPr>
+        <p:cNvPr id="1" name=""/>
+        <p:cNvGrpSpPr/>
+        <p:nvPr/>
+      </p:nvGrpSpPr>
+      <p:grpSpPr/>
+      <p:sp>
+        <p:nvSpPr>
+          <p:cNvPr id="2" name="Rectangle 1"/>
+          <p:cNvSpPr/>
+          <p:nvPr/>
+        </p:nvSpPr>
+        <p:spPr>
+          <a:xfrm>
+            <a:off x="0" y="0"/>
+            <a:ext cx="12191695" cy="6858000"/>
+          </a:xfrm>
+          <a:prstGeom prst="rect">
+            <a:avLst/>
+          </a:prstGeom>
+          <a:solidFill>
+            <a:srgbClr val="F9F7F2"/>
+          </a:solidFill>
+          <a:ln>
+            <a:noFill/>
+          </a:ln>
+        </p:spPr>
+        <p:style>
+          <a:lnRef idx="1">
+            <a:schemeClr val="accent1"/>
+          </a:lnRef>
+          <a:fillRef idx="3">
+            <a:schemeClr val="accent1"/>
+          </a:fillRef>
+          <a:effectRef idx="2">
+            <a:schemeClr val="accent1"/>
+          </a:effectRef>
+          <a:fontRef idx="minor">
+            <a:schemeClr val="lt1"/>
+          </a:fontRef>
+        </p:style>
+        <p:txBody>
+          <a:bodyPr rtlCol="0" anchor="ctr"/>
+          <a:lstStyle/>
+          <a:p>
+            <a:pPr algn="ctr"/>
+          </a:p>
+        </p:txBody>
+      </p:sp>
+      <p:sp>
+        <p:nvSpPr>
+          <p:cNvPr id="3" name="Rectangle 2"/>
+          <p:cNvSpPr/>
+          <p:nvPr/>
+        </p:nvSpPr>
+        <p:spPr>
+          <a:xfrm>
+            <a:off x="0" y="0"/>
+            <a:ext cx="164592" cy="6858000"/>
+          </a:xfrm>
+          <a:prstGeom prst="rect">
             <a:avLst/>
           </a:prstGeom>
           <a:solidFill>
@@ -6316,14 +6516,14 @@
       </p:sp>
       <p:sp>
         <p:nvSpPr>
-          <p:cNvPr id="9" name="TextBox 8"/>
+          <p:cNvPr id="4" name="TextBox 3"/>
           <p:cNvSpPr txBox="1"/>
           <p:nvPr/>
         </p:nvSpPr>
         <p:spPr>
           <a:xfrm>
-            <a:off x="960120" y="1618488"/>
-            <a:ext cx="10195560" cy="320040"/>
+            <a:off x="502920" y="274320"/>
+            <a:ext cx="5486400" cy="256032"/>
           </a:xfrm>
           <a:prstGeom prst="rect">
             <a:avLst/>
@@ -6331,35 +6531,35 @@
           <a:noFill/>
         </p:spPr>
         <p:txBody>
-          <a:bodyPr wrap="square" lIns="36576" rIns="36576" tIns="27432" bIns="27432">
+          <a:bodyPr wrap="square" lIns="45720" rIns="45720" tIns="36576" bIns="36576" anchor="t">
             <a:spAutoFit/>
           </a:bodyPr>
           <a:lstStyle/>
           <a:p>
             <a:pPr algn="l">
-              <a:defRPr sz="1400" b="1">
-                <a:solidFill>
-                  <a:srgbClr val="FFFFFF"/>
+              <a:defRPr sz="1000" b="1">
+                <a:solidFill>
+                  <a:srgbClr val="21597A"/>
                 </a:solidFill>
                 <a:latin typeface="Aptos"/>
               </a:defRPr>
             </a:pPr>
             <a:r>
-              <a:t>PREGUNTA DE SALIDA</a:t>
-            </a:r>
-          </a:p>
-        </p:txBody>
-      </p:sp>
-      <p:sp>
-        <p:nvSpPr>
-          <p:cNvPr id="10" name="TextBox 9"/>
+              <a:t>LÍMITES QUE PROTEGEN EL APRENDIZAJE</a:t>
+            </a:r>
+          </a:p>
+        </p:txBody>
+      </p:sp>
+      <p:sp>
+        <p:nvSpPr>
+          <p:cNvPr id="5" name="TextBox 4"/>
           <p:cNvSpPr txBox="1"/>
           <p:nvPr/>
         </p:nvSpPr>
         <p:spPr>
           <a:xfrm>
-            <a:off x="960120" y="2057400"/>
-            <a:ext cx="10058400" cy="822960"/>
+            <a:off x="502920" y="603504"/>
+            <a:ext cx="11064240" cy="530352"/>
           </a:xfrm>
           <a:prstGeom prst="rect">
             <a:avLst/>
@@ -6367,35 +6567,78 @@
           <a:noFill/>
         </p:spPr>
         <p:txBody>
-          <a:bodyPr wrap="square" lIns="36576" rIns="36576" tIns="27432" bIns="27432">
+          <a:bodyPr wrap="square" lIns="45720" rIns="45720" tIns="36576" bIns="36576" anchor="t">
             <a:spAutoFit/>
           </a:bodyPr>
           <a:lstStyle/>
           <a:p>
             <a:pPr algn="l">
-              <a:defRPr sz="2700" b="1">
-                <a:solidFill>
-                  <a:srgbClr val="FFFFFF"/>
+              <a:defRPr sz="2800" b="1">
+                <a:solidFill>
+                  <a:srgbClr val="1C2330"/>
                 </a:solidFill>
                 <a:latin typeface="Aptos"/>
               </a:defRPr>
             </a:pPr>
             <a:r>
-              <a:t>Ejecutar prueba completa delante del docente o de otro equipo.</a:t>
-            </a:r>
-          </a:p>
-        </p:txBody>
-      </p:sp>
-      <p:sp>
-        <p:nvSpPr>
-          <p:cNvPr id="11" name="TextBox 10"/>
+              <a:t>Seguridad y uso responsable</a:t>
+            </a:r>
+          </a:p>
+        </p:txBody>
+      </p:sp>
+      <p:sp>
+        <p:nvSpPr>
+          <p:cNvPr id="6" name="Rectangle 5"/>
+          <p:cNvSpPr/>
+          <p:nvPr/>
+        </p:nvSpPr>
+        <p:spPr>
+          <a:xfrm>
+            <a:off x="0" y="6601968"/>
+            <a:ext cx="12191695" cy="256032"/>
+          </a:xfrm>
+          <a:prstGeom prst="rect">
+            <a:avLst/>
+          </a:prstGeom>
+          <a:solidFill>
+            <a:srgbClr val="21597A"/>
+          </a:solidFill>
+          <a:ln>
+            <a:noFill/>
+          </a:ln>
+        </p:spPr>
+        <p:style>
+          <a:lnRef idx="1">
+            <a:schemeClr val="accent1"/>
+          </a:lnRef>
+          <a:fillRef idx="3">
+            <a:schemeClr val="accent1"/>
+          </a:fillRef>
+          <a:effectRef idx="2">
+            <a:schemeClr val="accent1"/>
+          </a:effectRef>
+          <a:fontRef idx="minor">
+            <a:schemeClr val="lt1"/>
+          </a:fontRef>
+        </p:style>
+        <p:txBody>
+          <a:bodyPr rtlCol="0" anchor="ctr"/>
+          <a:lstStyle/>
+          <a:p>
+            <a:pPr algn="ctr"/>
+          </a:p>
+        </p:txBody>
+      </p:sp>
+      <p:sp>
+        <p:nvSpPr>
+          <p:cNvPr id="7" name="TextBox 6"/>
           <p:cNvSpPr txBox="1"/>
           <p:nvPr/>
         </p:nvSpPr>
         <p:spPr>
           <a:xfrm>
-            <a:off x="713232" y="3703320"/>
-            <a:ext cx="3749039" cy="320040"/>
+            <a:off x="411480" y="6629400"/>
+            <a:ext cx="11247120" cy="164592"/>
           </a:xfrm>
           <a:prstGeom prst="rect">
             <a:avLst/>
@@ -6403,106 +6646,35 @@
           <a:noFill/>
         </p:spPr>
         <p:txBody>
-          <a:bodyPr wrap="square" lIns="36576" rIns="36576" tIns="27432" bIns="27432">
+          <a:bodyPr wrap="square" lIns="45720" rIns="45720" tIns="36576" bIns="36576" anchor="t">
             <a:spAutoFit/>
           </a:bodyPr>
           <a:lstStyle/>
           <a:p>
             <a:pPr algn="l">
-              <a:defRPr sz="1500" b="1">
-                <a:solidFill>
-                  <a:srgbClr val="21597A"/>
+              <a:defRPr sz="900" b="0">
+                <a:solidFill>
+                  <a:srgbClr val="FFFFFF"/>
                 </a:solidFill>
                 <a:latin typeface="Aptos"/>
               </a:defRPr>
             </a:pPr>
             <a:r>
-              <a:t>RECUERDA</a:t>
-            </a:r>
-          </a:p>
-        </p:txBody>
-      </p:sp>
-      <p:sp>
-        <p:nvSpPr>
-          <p:cNvPr id="12" name="TextBox 11"/>
-          <p:cNvSpPr txBox="1"/>
-          <p:nvPr/>
-        </p:nvSpPr>
-        <p:spPr>
-          <a:xfrm>
-            <a:off x="713232" y="4114800"/>
-            <a:ext cx="6583680" cy="1691640"/>
-          </a:xfrm>
-          <a:prstGeom prst="rect">
-            <a:avLst/>
-          </a:prstGeom>
-          <a:noFill/>
-        </p:spPr>
-        <p:txBody>
-          <a:bodyPr wrap="square" lIns="73152" rIns="45720" tIns="36576">
-            <a:spAutoFit/>
-          </a:bodyPr>
-          <a:lstStyle/>
-          <a:p>
-            <a:pPr>
-              <a:spcAft>
-                <a:spcPts val="1000"/>
-              </a:spcAft>
-              <a:defRPr sz="1700">
-                <a:solidFill>
-                  <a:srgbClr val="1C2330"/>
-                </a:solidFill>
-                <a:latin typeface="Aptos"/>
-              </a:defRPr>
-            </a:pPr>
-            <a:r>
-              <a:t>•  Trabaja únicamente con datos ficticios.</a:t>
-            </a:r>
-          </a:p>
-          <a:p>
-            <a:pPr>
-              <a:spcAft>
-                <a:spcPts val="1000"/>
-              </a:spcAft>
-              <a:defRPr sz="1700">
-                <a:solidFill>
-                  <a:srgbClr val="1C2330"/>
-                </a:solidFill>
-                <a:latin typeface="Aptos"/>
-              </a:defRPr>
-            </a:pPr>
-            <a:r>
-              <a:t>•  No escribas contraseñas, tokens, claves API ni datos personales.</a:t>
-            </a:r>
-          </a:p>
-          <a:p>
-            <a:pPr>
-              <a:spcAft>
-                <a:spcPts val="1000"/>
-              </a:spcAft>
-              <a:defRPr sz="1700">
-                <a:solidFill>
-                  <a:srgbClr val="1C2330"/>
-                </a:solidFill>
-                <a:latin typeface="Aptos"/>
-              </a:defRPr>
-            </a:pPr>
-            <a:r>
-              <a:t>•  Si utilizas IA en un uso permitido, registra qué pediste, qué recibiste, qué cambiaste y cómo lo comprobaste.</a:t>
-            </a:r>
-          </a:p>
-        </p:txBody>
-      </p:sp>
-      <p:sp>
-        <p:nvSpPr>
-          <p:cNvPr id="13" name="Rounded Rectangle 12"/>
+              <a:t>MiniJarvis · 1.º DAW · Sesión 288 · H6</a:t>
+            </a:r>
+          </a:p>
+        </p:txBody>
+      </p:sp>
+      <p:sp>
+        <p:nvSpPr>
+          <p:cNvPr id="8" name="Rounded Rectangle 7"/>
           <p:cNvSpPr/>
           <p:nvPr/>
         </p:nvSpPr>
         <p:spPr>
           <a:xfrm>
-            <a:off x="7726679" y="3794760"/>
-            <a:ext cx="3703320" cy="1600200"/>
+            <a:off x="621792" y="1298448"/>
+            <a:ext cx="5230368" cy="2176272"/>
           </a:xfrm>
           <a:prstGeom prst="roundRect">
             <a:avLst/>
@@ -6512,7 +6684,7 @@
           </a:solidFill>
           <a:ln>
             <a:solidFill>
-              <a:srgbClr val="EBEEF2"/>
+              <a:srgbClr val="E5E9EF"/>
             </a:solidFill>
           </a:ln>
         </p:spPr>
@@ -6540,14 +6712,57 @@
       </p:sp>
       <p:sp>
         <p:nvSpPr>
-          <p:cNvPr id="14" name="TextBox 13"/>
+          <p:cNvPr id="9" name="Rounded Rectangle 8"/>
+          <p:cNvSpPr/>
+          <p:nvPr/>
+        </p:nvSpPr>
+        <p:spPr>
+          <a:xfrm>
+            <a:off x="841248" y="1527048"/>
+            <a:ext cx="237744" cy="1719072"/>
+          </a:xfrm>
+          <a:prstGeom prst="roundRect">
+            <a:avLst/>
+          </a:prstGeom>
+          <a:solidFill>
+            <a:srgbClr val="247E5C"/>
+          </a:solidFill>
+          <a:ln>
+            <a:noFill/>
+          </a:ln>
+        </p:spPr>
+        <p:style>
+          <a:lnRef idx="1">
+            <a:schemeClr val="accent1"/>
+          </a:lnRef>
+          <a:fillRef idx="3">
+            <a:schemeClr val="accent1"/>
+          </a:fillRef>
+          <a:effectRef idx="2">
+            <a:schemeClr val="accent1"/>
+          </a:effectRef>
+          <a:fontRef idx="minor">
+            <a:schemeClr val="lt1"/>
+          </a:fontRef>
+        </p:style>
+        <p:txBody>
+          <a:bodyPr rtlCol="0" anchor="ctr"/>
+          <a:lstStyle/>
+          <a:p>
+            <a:pPr algn="ctr"/>
+          </a:p>
+        </p:txBody>
+      </p:sp>
+      <p:sp>
+        <p:nvSpPr>
+          <p:cNvPr id="10" name="TextBox 9"/>
           <p:cNvSpPr txBox="1"/>
           <p:nvPr/>
         </p:nvSpPr>
         <p:spPr>
           <a:xfrm>
-            <a:off x="8028431" y="4087368"/>
-            <a:ext cx="3063240" cy="868680"/>
+            <a:off x="1280160" y="1527048"/>
+            <a:ext cx="4224528" cy="1783080"/>
           </a:xfrm>
           <a:prstGeom prst="rect">
             <a:avLst/>
@@ -6555,13 +6770,793 @@
           <a:noFill/>
         </p:spPr>
         <p:txBody>
-          <a:bodyPr wrap="square" lIns="36576" rIns="36576" tIns="27432" bIns="27432">
+          <a:bodyPr wrap="square" lIns="45720" rIns="45720" tIns="36576" bIns="36576" anchor="t">
             <a:spAutoFit/>
           </a:bodyPr>
           <a:lstStyle/>
           <a:p>
+            <a:pPr algn="l">
+              <a:defRPr sz="1900" b="0">
+                <a:solidFill>
+                  <a:srgbClr val="1C2330"/>
+                </a:solidFill>
+                <a:latin typeface="Aptos"/>
+              </a:defRPr>
+            </a:pPr>
+            <a:r>
+              <a:t>Trabaja únicamente con datos ficticios.</a:t>
+            </a:r>
+          </a:p>
+        </p:txBody>
+      </p:sp>
+      <p:sp>
+        <p:nvSpPr>
+          <p:cNvPr id="11" name="Rounded Rectangle 10"/>
+          <p:cNvSpPr/>
+          <p:nvPr/>
+        </p:nvSpPr>
+        <p:spPr>
+          <a:xfrm>
+            <a:off x="6126479" y="1298448"/>
+            <a:ext cx="5230368" cy="2176272"/>
+          </a:xfrm>
+          <a:prstGeom prst="roundRect">
+            <a:avLst/>
+          </a:prstGeom>
+          <a:solidFill>
+            <a:srgbClr val="FFFFFF"/>
+          </a:solidFill>
+          <a:ln>
+            <a:solidFill>
+              <a:srgbClr val="E5E9EF"/>
+            </a:solidFill>
+          </a:ln>
+        </p:spPr>
+        <p:style>
+          <a:lnRef idx="1">
+            <a:schemeClr val="accent1"/>
+          </a:lnRef>
+          <a:fillRef idx="3">
+            <a:schemeClr val="accent1"/>
+          </a:fillRef>
+          <a:effectRef idx="2">
+            <a:schemeClr val="accent1"/>
+          </a:effectRef>
+          <a:fontRef idx="minor">
+            <a:schemeClr val="lt1"/>
+          </a:fontRef>
+        </p:style>
+        <p:txBody>
+          <a:bodyPr rtlCol="0" anchor="ctr"/>
+          <a:lstStyle/>
+          <a:p>
+            <a:pPr algn="ctr"/>
+          </a:p>
+        </p:txBody>
+      </p:sp>
+      <p:sp>
+        <p:nvSpPr>
+          <p:cNvPr id="12" name="Rounded Rectangle 11"/>
+          <p:cNvSpPr/>
+          <p:nvPr/>
+        </p:nvSpPr>
+        <p:spPr>
+          <a:xfrm>
+            <a:off x="6345936" y="1527048"/>
+            <a:ext cx="237744" cy="1719072"/>
+          </a:xfrm>
+          <a:prstGeom prst="roundRect">
+            <a:avLst/>
+          </a:prstGeom>
+          <a:solidFill>
+            <a:srgbClr val="C07020"/>
+          </a:solidFill>
+          <a:ln>
+            <a:noFill/>
+          </a:ln>
+        </p:spPr>
+        <p:style>
+          <a:lnRef idx="1">
+            <a:schemeClr val="accent1"/>
+          </a:lnRef>
+          <a:fillRef idx="3">
+            <a:schemeClr val="accent1"/>
+          </a:fillRef>
+          <a:effectRef idx="2">
+            <a:schemeClr val="accent1"/>
+          </a:effectRef>
+          <a:fontRef idx="minor">
+            <a:schemeClr val="lt1"/>
+          </a:fontRef>
+        </p:style>
+        <p:txBody>
+          <a:bodyPr rtlCol="0" anchor="ctr"/>
+          <a:lstStyle/>
+          <a:p>
+            <a:pPr algn="ctr"/>
+          </a:p>
+        </p:txBody>
+      </p:sp>
+      <p:sp>
+        <p:nvSpPr>
+          <p:cNvPr id="13" name="TextBox 12"/>
+          <p:cNvSpPr txBox="1"/>
+          <p:nvPr/>
+        </p:nvSpPr>
+        <p:spPr>
+          <a:xfrm>
+            <a:off x="6784847" y="1527048"/>
+            <a:ext cx="4224528" cy="1783080"/>
+          </a:xfrm>
+          <a:prstGeom prst="rect">
+            <a:avLst/>
+          </a:prstGeom>
+          <a:noFill/>
+        </p:spPr>
+        <p:txBody>
+          <a:bodyPr wrap="square" lIns="45720" rIns="45720" tIns="36576" bIns="36576" anchor="t">
+            <a:spAutoFit/>
+          </a:bodyPr>
+          <a:lstStyle/>
+          <a:p>
+            <a:pPr algn="l">
+              <a:defRPr sz="1900" b="0">
+                <a:solidFill>
+                  <a:srgbClr val="1C2330"/>
+                </a:solidFill>
+                <a:latin typeface="Aptos"/>
+              </a:defRPr>
+            </a:pPr>
+            <a:r>
+              <a:t>No escribas contraseñas, tokens, claves API ni datos personales.</a:t>
+            </a:r>
+          </a:p>
+        </p:txBody>
+      </p:sp>
+      <p:sp>
+        <p:nvSpPr>
+          <p:cNvPr id="14" name="Rounded Rectangle 13"/>
+          <p:cNvSpPr/>
+          <p:nvPr/>
+        </p:nvSpPr>
+        <p:spPr>
+          <a:xfrm>
+            <a:off x="621792" y="3675887"/>
+            <a:ext cx="5230368" cy="2176272"/>
+          </a:xfrm>
+          <a:prstGeom prst="roundRect">
+            <a:avLst/>
+          </a:prstGeom>
+          <a:solidFill>
+            <a:srgbClr val="FFFFFF"/>
+          </a:solidFill>
+          <a:ln>
+            <a:solidFill>
+              <a:srgbClr val="E5E9EF"/>
+            </a:solidFill>
+          </a:ln>
+        </p:spPr>
+        <p:style>
+          <a:lnRef idx="1">
+            <a:schemeClr val="accent1"/>
+          </a:lnRef>
+          <a:fillRef idx="3">
+            <a:schemeClr val="accent1"/>
+          </a:fillRef>
+          <a:effectRef idx="2">
+            <a:schemeClr val="accent1"/>
+          </a:effectRef>
+          <a:fontRef idx="minor">
+            <a:schemeClr val="lt1"/>
+          </a:fontRef>
+        </p:style>
+        <p:txBody>
+          <a:bodyPr rtlCol="0" anchor="ctr"/>
+          <a:lstStyle/>
+          <a:p>
+            <a:pPr algn="ctr"/>
+          </a:p>
+        </p:txBody>
+      </p:sp>
+      <p:sp>
+        <p:nvSpPr>
+          <p:cNvPr id="15" name="Rounded Rectangle 14"/>
+          <p:cNvSpPr/>
+          <p:nvPr/>
+        </p:nvSpPr>
+        <p:spPr>
+          <a:xfrm>
+            <a:off x="841248" y="3904487"/>
+            <a:ext cx="237744" cy="1719072"/>
+          </a:xfrm>
+          <a:prstGeom prst="roundRect">
+            <a:avLst/>
+          </a:prstGeom>
+          <a:solidFill>
+            <a:srgbClr val="B13A3A"/>
+          </a:solidFill>
+          <a:ln>
+            <a:noFill/>
+          </a:ln>
+        </p:spPr>
+        <p:style>
+          <a:lnRef idx="1">
+            <a:schemeClr val="accent1"/>
+          </a:lnRef>
+          <a:fillRef idx="3">
+            <a:schemeClr val="accent1"/>
+          </a:fillRef>
+          <a:effectRef idx="2">
+            <a:schemeClr val="accent1"/>
+          </a:effectRef>
+          <a:fontRef idx="minor">
+            <a:schemeClr val="lt1"/>
+          </a:fontRef>
+        </p:style>
+        <p:txBody>
+          <a:bodyPr rtlCol="0" anchor="ctr"/>
+          <a:lstStyle/>
+          <a:p>
+            <a:pPr algn="ctr"/>
+          </a:p>
+        </p:txBody>
+      </p:sp>
+      <p:sp>
+        <p:nvSpPr>
+          <p:cNvPr id="16" name="TextBox 15"/>
+          <p:cNvSpPr txBox="1"/>
+          <p:nvPr/>
+        </p:nvSpPr>
+        <p:spPr>
+          <a:xfrm>
+            <a:off x="1280160" y="3904487"/>
+            <a:ext cx="4224528" cy="1783080"/>
+          </a:xfrm>
+          <a:prstGeom prst="rect">
+            <a:avLst/>
+          </a:prstGeom>
+          <a:noFill/>
+        </p:spPr>
+        <p:txBody>
+          <a:bodyPr wrap="square" lIns="45720" rIns="45720" tIns="36576" bIns="36576" anchor="t">
+            <a:spAutoFit/>
+          </a:bodyPr>
+          <a:lstStyle/>
+          <a:p>
+            <a:pPr algn="l">
+              <a:defRPr sz="1900" b="0">
+                <a:solidFill>
+                  <a:srgbClr val="1C2330"/>
+                </a:solidFill>
+                <a:latin typeface="Aptos"/>
+              </a:defRPr>
+            </a:pPr>
+            <a:r>
+              <a:t>Si utilizas IA en un uso permitido, registra qué pediste, qué recibiste, qué cambiaste y cómo lo comprobaste.</a:t>
+            </a:r>
+          </a:p>
+        </p:txBody>
+      </p:sp>
+      <p:sp>
+        <p:nvSpPr>
+          <p:cNvPr id="17" name="Rounded Rectangle 16"/>
+          <p:cNvSpPr/>
+          <p:nvPr/>
+        </p:nvSpPr>
+        <p:spPr>
+          <a:xfrm>
+            <a:off x="6126479" y="3675887"/>
+            <a:ext cx="5230368" cy="2176272"/>
+          </a:xfrm>
+          <a:prstGeom prst="roundRect">
+            <a:avLst/>
+          </a:prstGeom>
+          <a:solidFill>
+            <a:srgbClr val="FFFFFF"/>
+          </a:solidFill>
+          <a:ln>
+            <a:solidFill>
+              <a:srgbClr val="E5E9EF"/>
+            </a:solidFill>
+          </a:ln>
+        </p:spPr>
+        <p:style>
+          <a:lnRef idx="1">
+            <a:schemeClr val="accent1"/>
+          </a:lnRef>
+          <a:fillRef idx="3">
+            <a:schemeClr val="accent1"/>
+          </a:fillRef>
+          <a:effectRef idx="2">
+            <a:schemeClr val="accent1"/>
+          </a:effectRef>
+          <a:fontRef idx="minor">
+            <a:schemeClr val="lt1"/>
+          </a:fontRef>
+        </p:style>
+        <p:txBody>
+          <a:bodyPr rtlCol="0" anchor="ctr"/>
+          <a:lstStyle/>
+          <a:p>
+            <a:pPr algn="ctr"/>
+          </a:p>
+        </p:txBody>
+      </p:sp>
+      <p:sp>
+        <p:nvSpPr>
+          <p:cNvPr id="18" name="Rounded Rectangle 17"/>
+          <p:cNvSpPr/>
+          <p:nvPr/>
+        </p:nvSpPr>
+        <p:spPr>
+          <a:xfrm>
+            <a:off x="6345936" y="3904487"/>
+            <a:ext cx="237744" cy="1719072"/>
+          </a:xfrm>
+          <a:prstGeom prst="roundRect">
+            <a:avLst/>
+          </a:prstGeom>
+          <a:solidFill>
+            <a:srgbClr val="21597A"/>
+          </a:solidFill>
+          <a:ln>
+            <a:noFill/>
+          </a:ln>
+        </p:spPr>
+        <p:style>
+          <a:lnRef idx="1">
+            <a:schemeClr val="accent1"/>
+          </a:lnRef>
+          <a:fillRef idx="3">
+            <a:schemeClr val="accent1"/>
+          </a:fillRef>
+          <a:effectRef idx="2">
+            <a:schemeClr val="accent1"/>
+          </a:effectRef>
+          <a:fontRef idx="minor">
+            <a:schemeClr val="lt1"/>
+          </a:fontRef>
+        </p:style>
+        <p:txBody>
+          <a:bodyPr rtlCol="0" anchor="ctr"/>
+          <a:lstStyle/>
+          <a:p>
+            <a:pPr algn="ctr"/>
+          </a:p>
+        </p:txBody>
+      </p:sp>
+      <p:sp>
+        <p:nvSpPr>
+          <p:cNvPr id="19" name="TextBox 18"/>
+          <p:cNvSpPr txBox="1"/>
+          <p:nvPr/>
+        </p:nvSpPr>
+        <p:spPr>
+          <a:xfrm>
+            <a:off x="6784847" y="3904487"/>
+            <a:ext cx="4224528" cy="1783080"/>
+          </a:xfrm>
+          <a:prstGeom prst="rect">
+            <a:avLst/>
+          </a:prstGeom>
+          <a:noFill/>
+        </p:spPr>
+        <p:txBody>
+          <a:bodyPr wrap="square" lIns="45720" rIns="45720" tIns="36576" bIns="36576" anchor="t">
+            <a:spAutoFit/>
+          </a:bodyPr>
+          <a:lstStyle/>
+          <a:p>
+            <a:pPr algn="l">
+              <a:defRPr sz="1900" b="0">
+                <a:solidFill>
+                  <a:srgbClr val="1C2330"/>
+                </a:solidFill>
+                <a:latin typeface="Aptos"/>
+              </a:defRPr>
+            </a:pPr>
+            <a:r>
+              <a:t>Los ejemplos de Laura solo se consultan después del intento propio.</a:t>
+            </a:r>
+          </a:p>
+        </p:txBody>
+      </p:sp>
+    </p:spTree>
+  </p:cSld>
+  <p:clrMapOvr>
+    <a:masterClrMapping/>
+  </p:clrMapOvr>
+</p:sld>
+</file>
+
+<file path=ppt/slides/slide8.xml><?xml version="1.0" encoding="utf-8"?>
+<p:sld xmlns:a="http://schemas.openxmlformats.org/drawingml/2006/main" xmlns:p="http://schemas.openxmlformats.org/presentationml/2006/main" xmlns:r="http://schemas.openxmlformats.org/officeDocument/2006/relationships">
+  <p:cSld>
+    <p:spTree>
+      <p:nvGrpSpPr>
+        <p:cNvPr id="1" name=""/>
+        <p:cNvGrpSpPr/>
+        <p:nvPr/>
+      </p:nvGrpSpPr>
+      <p:grpSpPr/>
+      <p:sp>
+        <p:nvSpPr>
+          <p:cNvPr id="2" name="Rectangle 1"/>
+          <p:cNvSpPr/>
+          <p:nvPr/>
+        </p:nvSpPr>
+        <p:spPr>
+          <a:xfrm>
+            <a:off x="0" y="0"/>
+            <a:ext cx="12191695" cy="6858000"/>
+          </a:xfrm>
+          <a:prstGeom prst="rect">
+            <a:avLst/>
+          </a:prstGeom>
+          <a:solidFill>
+            <a:srgbClr val="F9F7F2"/>
+          </a:solidFill>
+          <a:ln>
+            <a:noFill/>
+          </a:ln>
+        </p:spPr>
+        <p:style>
+          <a:lnRef idx="1">
+            <a:schemeClr val="accent1"/>
+          </a:lnRef>
+          <a:fillRef idx="3">
+            <a:schemeClr val="accent1"/>
+          </a:fillRef>
+          <a:effectRef idx="2">
+            <a:schemeClr val="accent1"/>
+          </a:effectRef>
+          <a:fontRef idx="minor">
+            <a:schemeClr val="lt1"/>
+          </a:fontRef>
+        </p:style>
+        <p:txBody>
+          <a:bodyPr rtlCol="0" anchor="ctr"/>
+          <a:lstStyle/>
+          <a:p>
+            <a:pPr algn="ctr"/>
+          </a:p>
+        </p:txBody>
+      </p:sp>
+      <p:sp>
+        <p:nvSpPr>
+          <p:cNvPr id="3" name="Rectangle 2"/>
+          <p:cNvSpPr/>
+          <p:nvPr/>
+        </p:nvSpPr>
+        <p:spPr>
+          <a:xfrm>
+            <a:off x="0" y="0"/>
+            <a:ext cx="164592" cy="6858000"/>
+          </a:xfrm>
+          <a:prstGeom prst="rect">
+            <a:avLst/>
+          </a:prstGeom>
+          <a:solidFill>
+            <a:srgbClr val="21597A"/>
+          </a:solidFill>
+          <a:ln>
+            <a:noFill/>
+          </a:ln>
+        </p:spPr>
+        <p:style>
+          <a:lnRef idx="1">
+            <a:schemeClr val="accent1"/>
+          </a:lnRef>
+          <a:fillRef idx="3">
+            <a:schemeClr val="accent1"/>
+          </a:fillRef>
+          <a:effectRef idx="2">
+            <a:schemeClr val="accent1"/>
+          </a:effectRef>
+          <a:fontRef idx="minor">
+            <a:schemeClr val="lt1"/>
+          </a:fontRef>
+        </p:style>
+        <p:txBody>
+          <a:bodyPr rtlCol="0" anchor="ctr"/>
+          <a:lstStyle/>
+          <a:p>
+            <a:pPr algn="ctr"/>
+          </a:p>
+        </p:txBody>
+      </p:sp>
+      <p:sp>
+        <p:nvSpPr>
+          <p:cNvPr id="4" name="TextBox 3"/>
+          <p:cNvSpPr txBox="1"/>
+          <p:nvPr/>
+        </p:nvSpPr>
+        <p:spPr>
+          <a:xfrm>
+            <a:off x="502920" y="274320"/>
+            <a:ext cx="5486400" cy="256032"/>
+          </a:xfrm>
+          <a:prstGeom prst="rect">
+            <a:avLst/>
+          </a:prstGeom>
+          <a:noFill/>
+        </p:spPr>
+        <p:txBody>
+          <a:bodyPr wrap="square" lIns="45720" rIns="45720" tIns="36576" bIns="36576" anchor="t">
+            <a:spAutoFit/>
+          </a:bodyPr>
+          <a:lstStyle/>
+          <a:p>
+            <a:pPr algn="l">
+              <a:defRPr sz="1000" b="1">
+                <a:solidFill>
+                  <a:srgbClr val="21597A"/>
+                </a:solidFill>
+                <a:latin typeface="Aptos"/>
+              </a:defRPr>
+            </a:pPr>
+            <a:r>
+              <a:t>EXPLICAR Y DEFENDER</a:t>
+            </a:r>
+          </a:p>
+        </p:txBody>
+      </p:sp>
+      <p:sp>
+        <p:nvSpPr>
+          <p:cNvPr id="5" name="TextBox 4"/>
+          <p:cNvSpPr txBox="1"/>
+          <p:nvPr/>
+        </p:nvSpPr>
+        <p:spPr>
+          <a:xfrm>
+            <a:off x="502920" y="603504"/>
+            <a:ext cx="11064240" cy="530352"/>
+          </a:xfrm>
+          <a:prstGeom prst="rect">
+            <a:avLst/>
+          </a:prstGeom>
+          <a:noFill/>
+        </p:spPr>
+        <p:txBody>
+          <a:bodyPr wrap="square" lIns="45720" rIns="45720" tIns="36576" bIns="36576" anchor="t">
+            <a:spAutoFit/>
+          </a:bodyPr>
+          <a:lstStyle/>
+          <a:p>
+            <a:pPr algn="l">
+              <a:defRPr sz="2800" b="1">
+                <a:solidFill>
+                  <a:srgbClr val="1C2330"/>
+                </a:solidFill>
+                <a:latin typeface="Aptos"/>
+              </a:defRPr>
+            </a:pPr>
+            <a:r>
+              <a:t>Cierre y defensa</a:t>
+            </a:r>
+          </a:p>
+        </p:txBody>
+      </p:sp>
+      <p:sp>
+        <p:nvSpPr>
+          <p:cNvPr id="6" name="Rectangle 5"/>
+          <p:cNvSpPr/>
+          <p:nvPr/>
+        </p:nvSpPr>
+        <p:spPr>
+          <a:xfrm>
+            <a:off x="0" y="6601968"/>
+            <a:ext cx="12191695" cy="256032"/>
+          </a:xfrm>
+          <a:prstGeom prst="rect">
+            <a:avLst/>
+          </a:prstGeom>
+          <a:solidFill>
+            <a:srgbClr val="21597A"/>
+          </a:solidFill>
+          <a:ln>
+            <a:noFill/>
+          </a:ln>
+        </p:spPr>
+        <p:style>
+          <a:lnRef idx="1">
+            <a:schemeClr val="accent1"/>
+          </a:lnRef>
+          <a:fillRef idx="3">
+            <a:schemeClr val="accent1"/>
+          </a:fillRef>
+          <a:effectRef idx="2">
+            <a:schemeClr val="accent1"/>
+          </a:effectRef>
+          <a:fontRef idx="minor">
+            <a:schemeClr val="lt1"/>
+          </a:fontRef>
+        </p:style>
+        <p:txBody>
+          <a:bodyPr rtlCol="0" anchor="ctr"/>
+          <a:lstStyle/>
+          <a:p>
+            <a:pPr algn="ctr"/>
+          </a:p>
+        </p:txBody>
+      </p:sp>
+      <p:sp>
+        <p:nvSpPr>
+          <p:cNvPr id="7" name="TextBox 6"/>
+          <p:cNvSpPr txBox="1"/>
+          <p:nvPr/>
+        </p:nvSpPr>
+        <p:spPr>
+          <a:xfrm>
+            <a:off x="411480" y="6629400"/>
+            <a:ext cx="11247120" cy="164592"/>
+          </a:xfrm>
+          <a:prstGeom prst="rect">
+            <a:avLst/>
+          </a:prstGeom>
+          <a:noFill/>
+        </p:spPr>
+        <p:txBody>
+          <a:bodyPr wrap="square" lIns="45720" rIns="45720" tIns="36576" bIns="36576" anchor="t">
+            <a:spAutoFit/>
+          </a:bodyPr>
+          <a:lstStyle/>
+          <a:p>
+            <a:pPr algn="l">
+              <a:defRPr sz="900" b="0">
+                <a:solidFill>
+                  <a:srgbClr val="FFFFFF"/>
+                </a:solidFill>
+                <a:latin typeface="Aptos"/>
+              </a:defRPr>
+            </a:pPr>
+            <a:r>
+              <a:t>MiniJarvis · 1.º DAW · Sesión 288 · H6</a:t>
+            </a:r>
+          </a:p>
+        </p:txBody>
+      </p:sp>
+      <p:sp>
+        <p:nvSpPr>
+          <p:cNvPr id="8" name="Rounded Rectangle 7"/>
+          <p:cNvSpPr/>
+          <p:nvPr/>
+        </p:nvSpPr>
+        <p:spPr>
+          <a:xfrm>
+            <a:off x="621792" y="1298448"/>
+            <a:ext cx="10927080" cy="1828800"/>
+          </a:xfrm>
+          <a:prstGeom prst="roundRect">
+            <a:avLst/>
+          </a:prstGeom>
+          <a:solidFill>
+            <a:srgbClr val="21597A"/>
+          </a:solidFill>
+          <a:ln>
+            <a:solidFill>
+              <a:srgbClr val="21597A"/>
+            </a:solidFill>
+          </a:ln>
+        </p:spPr>
+        <p:style>
+          <a:lnRef idx="1">
+            <a:schemeClr val="accent1"/>
+          </a:lnRef>
+          <a:fillRef idx="3">
+            <a:schemeClr val="accent1"/>
+          </a:fillRef>
+          <a:effectRef idx="2">
+            <a:schemeClr val="accent1"/>
+          </a:effectRef>
+          <a:fontRef idx="minor">
+            <a:schemeClr val="lt1"/>
+          </a:fontRef>
+        </p:style>
+        <p:txBody>
+          <a:bodyPr rtlCol="0" anchor="ctr"/>
+          <a:lstStyle/>
+          <a:p>
+            <a:pPr algn="ctr"/>
+          </a:p>
+        </p:txBody>
+      </p:sp>
+      <p:sp>
+        <p:nvSpPr>
+          <p:cNvPr id="9" name="TextBox 8"/>
+          <p:cNvSpPr txBox="1"/>
+          <p:nvPr/>
+        </p:nvSpPr>
+        <p:spPr>
+          <a:xfrm>
+            <a:off x="932688" y="1591056"/>
+            <a:ext cx="10241280" cy="256032"/>
+          </a:xfrm>
+          <a:prstGeom prst="rect">
+            <a:avLst/>
+          </a:prstGeom>
+          <a:noFill/>
+        </p:spPr>
+        <p:txBody>
+          <a:bodyPr wrap="square" lIns="45720" rIns="45720" tIns="36576" bIns="36576" anchor="t">
+            <a:spAutoFit/>
+          </a:bodyPr>
+          <a:lstStyle/>
+          <a:p>
+            <a:pPr algn="l">
+              <a:defRPr sz="1300" b="1">
+                <a:solidFill>
+                  <a:srgbClr val="FFFFFF"/>
+                </a:solidFill>
+                <a:latin typeface="Aptos"/>
+              </a:defRPr>
+            </a:pPr>
+            <a:r>
+              <a:t>PREGUNTA O DECISIÓN DE SALIDA</a:t>
+            </a:r>
+          </a:p>
+        </p:txBody>
+      </p:sp>
+      <p:sp>
+        <p:nvSpPr>
+          <p:cNvPr id="10" name="TextBox 9"/>
+          <p:cNvSpPr txBox="1"/>
+          <p:nvPr/>
+        </p:nvSpPr>
+        <p:spPr>
+          <a:xfrm>
+            <a:off x="932688" y="1975104"/>
+            <a:ext cx="10058400" cy="822960"/>
+          </a:xfrm>
+          <a:prstGeom prst="rect">
+            <a:avLst/>
+          </a:prstGeom>
+          <a:noFill/>
+        </p:spPr>
+        <p:txBody>
+          <a:bodyPr wrap="square" lIns="45720" rIns="45720" tIns="36576" bIns="36576" anchor="t">
+            <a:spAutoFit/>
+          </a:bodyPr>
+          <a:lstStyle/>
+          <a:p>
+            <a:pPr algn="l">
+              <a:defRPr sz="2500" b="1">
+                <a:solidFill>
+                  <a:srgbClr val="FFFFFF"/>
+                </a:solidFill>
+                <a:latin typeface="Aptos"/>
+              </a:defRPr>
+            </a:pPr>
+            <a:r>
+              <a:t>Ejecutar prueba completa delante del docente o de otro equipo.</a:t>
+            </a:r>
+          </a:p>
+        </p:txBody>
+      </p:sp>
+      <p:sp>
+        <p:nvSpPr>
+          <p:cNvPr id="11" name="TextBox 10"/>
+          <p:cNvSpPr txBox="1"/>
+          <p:nvPr/>
+        </p:nvSpPr>
+        <p:spPr>
+          <a:xfrm>
+            <a:off x="749808" y="3886200"/>
+            <a:ext cx="10607040" cy="1280160"/>
+          </a:xfrm>
+          <a:prstGeom prst="rect">
+            <a:avLst/>
+          </a:prstGeom>
+          <a:noFill/>
+        </p:spPr>
+        <p:txBody>
+          <a:bodyPr wrap="square" lIns="45720" rIns="45720" tIns="36576" bIns="36576" anchor="ctr">
+            <a:spAutoFit/>
+          </a:bodyPr>
+          <a:lstStyle/>
+          <a:p>
             <a:pPr algn="ctr">
-              <a:defRPr sz="1800" b="1">
+              <a:defRPr sz="2300" b="1">
                 <a:solidFill>
                   <a:srgbClr val="247E5C"/>
                 </a:solidFill>
@@ -6569,7 +7564,7 @@
               </a:defRPr>
             </a:pPr>
             <a:r>
-              <a:t>La sesión termina cuando la evidencia existe, está comprobada y puedes defenderla.</a:t>
+              <a:t>La sesión termina cuando la evidencia existe, está comprobada y puede defenderse.</a:t>
             </a:r>
           </a:p>
         </p:txBody>

--- a/02-PROFESORADO/03-PRESENTACIONES/POR-SESION/h6/S288-pruebas-de-persistencia-presentacion.pptx
+++ b/02-PROFESORADO/03-PRESENTACIONES/POR-SESION/h6/S288-pruebas-de-persistencia-presentacion.pptx
@@ -3818,7 +3818,7 @@
               </a:defRPr>
             </a:pPr>
             <a:r>
-              <a:t>Evidencia: docs/pruebas-persistencia-h6.md.</a:t>
+              <a:t>Evidencia: README, sección Pruebas de persistencia.</a:t>
             </a:r>
           </a:p>
         </p:txBody>
@@ -5745,7 +5745,7 @@
               </a:defRPr>
             </a:pPr>
             <a:r>
-              <a:t>Comprueba y registra la evidencia: docs/pruebas-persistencia-h6.md.</a:t>
+              <a:t>Comprueba y registra la evidencia: README, sección Pruebas de persistencia.</a:t>
             </a:r>
           </a:p>
         </p:txBody>
@@ -6081,7 +6081,7 @@
               </a:defRPr>
             </a:pPr>
             <a:r>
-              <a:t>He producido o actualizado: docs/pruebas-persistencia-h6.</a:t>
+              <a:t>Pueden explicar qué están intentando conseguir.</a:t>
             </a:r>
           </a:p>
         </p:txBody>
@@ -6162,7 +6162,7 @@
               </a:defRPr>
             </a:pPr>
             <a:r>
-              <a:t>Puedo señalar dónde está.</a:t>
+              <a:t>Registran una decisión, prueba o bloqueo; no muestran solo el resultado final.</a:t>
             </a:r>
           </a:p>
         </p:txBody>
@@ -6243,7 +6243,7 @@
               </a:defRPr>
             </a:pPr>
             <a:r>
-              <a:t>Puedo explicar una decisión tomada.</a:t>
+              <a:t>Todas las personas pueden describir su aportación.</a:t>
             </a:r>
           </a:p>
         </p:txBody>
@@ -6324,7 +6324,7 @@
               </a:defRPr>
             </a:pPr>
             <a:r>
-              <a:t>Puedo mostrar una prueba o comprobación.</a:t>
+              <a:t>Comprueban el producto con un criterio observable.</a:t>
             </a:r>
           </a:p>
         </p:txBody>
@@ -6405,7 +6405,7 @@
               </a:defRPr>
             </a:pPr>
             <a:r>
-              <a:t>He registrado mi aportación individual si el trabajo era de equipo.</a:t>
+              <a:t>No usan datos personales, credenciales ni respuestas de ejemplo antes del intento propio.</a:t>
             </a:r>
           </a:p>
         </p:txBody>

--- a/02-PROFESORADO/03-PRESENTACIONES/POR-SESION/h6/S288-pruebas-de-persistencia-presentacion.pptx
+++ b/02-PROFESORADO/03-PRESENTACIONES/POR-SESION/h6/S288-pruebas-de-persistencia-presentacion.pptx
@@ -3378,8 +3378,8 @@
         </p:nvSpPr>
         <p:spPr>
           <a:xfrm>
-            <a:off x="713232" y="6272784"/>
-            <a:ext cx="10607040" cy="201168"/>
+            <a:off x="713232" y="4965192"/>
+            <a:ext cx="10241280" cy="594360"/>
           </a:xfrm>
           <a:prstGeom prst="rect">
             <a:avLst/>
@@ -3393,6 +3393,42 @@
           <a:lstStyle/>
           <a:p>
             <a:pPr algn="l">
+              <a:defRPr sz="1700" b="0">
+                <a:solidFill>
+                  <a:srgbClr val="D2D9E4"/>
+                </a:solidFill>
+                <a:latin typeface="Aptos"/>
+              </a:defRPr>
+            </a:pPr>
+            <a:r>
+              <a:t>Equipo</a:t>
+            </a:r>
+          </a:p>
+        </p:txBody>
+      </p:sp>
+      <p:sp>
+        <p:nvSpPr>
+          <p:cNvPr id="10" name="TextBox 9"/>
+          <p:cNvSpPr txBox="1"/>
+          <p:nvPr/>
+        </p:nvSpPr>
+        <p:spPr>
+          <a:xfrm>
+            <a:off x="713232" y="6272784"/>
+            <a:ext cx="10607040" cy="201168"/>
+          </a:xfrm>
+          <a:prstGeom prst="rect">
+            <a:avLst/>
+          </a:prstGeom>
+          <a:noFill/>
+        </p:spPr>
+        <p:txBody>
+          <a:bodyPr wrap="square" lIns="45720" rIns="45720" tIns="36576" bIns="36576" anchor="t">
+            <a:spAutoFit/>
+          </a:bodyPr>
+          <a:lstStyle/>
+          <a:p>
+            <a:pPr algn="l">
               <a:defRPr sz="1000" b="1">
                 <a:solidFill>
                   <a:srgbClr val="A0AAB9"/>
@@ -3401,7 +3437,7 @@
               </a:defRPr>
             </a:pPr>
             <a:r>
-              <a:t>MINIJARVIS · PROGRAMACIÓN + ENTORNOS DE DESARROLLO</a:t>
+              <a:t>MINIJARVIS · PROGRAMACIÓN</a:t>
             </a:r>
           </a:p>
         </p:txBody>

--- a/02-PROFESORADO/03-PRESENTACIONES/POR-SESION/h6/S288-pruebas-de-persistencia-presentacion.pptx
+++ b/02-PROFESORADO/03-PRESENTACIONES/POR-SESION/h6/S288-pruebas-de-persistencia-presentacion.pptx
@@ -112,6 +112,884 @@
     </a:lvl9pPr>
   </p:defaultTextStyle>
 </p:presentation>
+</file>
+
+<file path=ppt/notesMasters/notesMaster1.xml><?xml version="1.0" encoding="utf-8"?>
+<p:notesMaster xmlns:a="http://schemas.openxmlformats.org/drawingml/2006/main" xmlns:p="http://schemas.openxmlformats.org/presentationml/2006/main" xmlns:r="http://schemas.openxmlformats.org/officeDocument/2006/relationships">
+  <p:cSld>
+    <p:bg>
+      <p:bgRef idx="1001">
+        <a:schemeClr val="bg1"/>
+      </p:bgRef>
+    </p:bg>
+    <p:spTree>
+      <p:nvGrpSpPr>
+        <p:cNvPr id="1" name=""/>
+        <p:cNvGrpSpPr/>
+        <p:nvPr/>
+      </p:nvGrpSpPr>
+      <p:grpSpPr>
+        <a:xfrm>
+          <a:off x="0" y="0"/>
+          <a:ext cx="0" cy="0"/>
+          <a:chOff x="0" y="0"/>
+          <a:chExt cx="0" cy="0"/>
+        </a:xfrm>
+      </p:grpSpPr>
+      <p:sp>
+        <p:nvSpPr>
+          <p:cNvPr id="2" name="Header Placeholder 1"/>
+          <p:cNvSpPr>
+            <a:spLocks noGrp="1"/>
+          </p:cNvSpPr>
+          <p:nvPr>
+            <p:ph type="hdr" sz="quarter"/>
+          </p:nvPr>
+        </p:nvSpPr>
+        <p:spPr>
+          <a:xfrm>
+            <a:off x="0" y="0"/>
+            <a:ext cx="2971800" cy="457200"/>
+          </a:xfrm>
+          <a:prstGeom prst="rect">
+            <a:avLst/>
+          </a:prstGeom>
+        </p:spPr>
+        <p:txBody>
+          <a:bodyPr vert="horz" lIns="91440" tIns="45720" rIns="91440" bIns="45720" rtlCol="0"/>
+          <a:lstStyle>
+            <a:lvl1pPr algn="l">
+              <a:defRPr sz="1200"/>
+            </a:lvl1pPr>
+          </a:lstStyle>
+          <a:p>
+            <a:endParaRPr lang="en-US"/>
+          </a:p>
+        </p:txBody>
+      </p:sp>
+      <p:sp>
+        <p:nvSpPr>
+          <p:cNvPr id="3" name="Date Placeholder 2"/>
+          <p:cNvSpPr>
+            <a:spLocks noGrp="1"/>
+          </p:cNvSpPr>
+          <p:nvPr>
+            <p:ph type="dt" idx="1"/>
+          </p:nvPr>
+        </p:nvSpPr>
+        <p:spPr>
+          <a:xfrm>
+            <a:off x="3884613" y="0"/>
+            <a:ext cx="2971800" cy="457200"/>
+          </a:xfrm>
+          <a:prstGeom prst="rect">
+            <a:avLst/>
+          </a:prstGeom>
+        </p:spPr>
+        <p:txBody>
+          <a:bodyPr vert="horz" lIns="91440" tIns="45720" rIns="91440" bIns="45720" rtlCol="0"/>
+          <a:lstStyle>
+            <a:lvl1pPr algn="r">
+              <a:defRPr sz="1200"/>
+            </a:lvl1pPr>
+          </a:lstStyle>
+          <a:p>
+            <a:fld id="{0F89C1C7-3DCD-1040-A9CF-14679D8B5DDD}" type="datetimeFigureOut">
+              <a:rPr lang="en-US" smtClean="0"/>
+              <a:t>10/17/16</a:t>
+            </a:fld>
+            <a:endParaRPr lang="en-US"/>
+          </a:p>
+        </p:txBody>
+      </p:sp>
+      <p:sp>
+        <p:nvSpPr>
+          <p:cNvPr id="4" name="Slide Image Placeholder 3"/>
+          <p:cNvSpPr>
+            <a:spLocks noGrp="1" noRot="1" noChangeAspect="1"/>
+          </p:cNvSpPr>
+          <p:nvPr>
+            <p:ph type="sldImg" idx="2"/>
+          </p:nvPr>
+        </p:nvSpPr>
+        <p:spPr>
+          <a:xfrm>
+            <a:off x="1143000" y="685800"/>
+            <a:ext cx="4572000" cy="3429000"/>
+          </a:xfrm>
+          <a:prstGeom prst="rect">
+            <a:avLst/>
+          </a:prstGeom>
+          <a:noFill/>
+          <a:ln w="12700">
+            <a:solidFill>
+              <a:prstClr val="black"/>
+            </a:solidFill>
+          </a:ln>
+        </p:spPr>
+        <p:txBody>
+          <a:bodyPr vert="horz" lIns="91440" tIns="45720" rIns="91440" bIns="45720" rtlCol="0" anchor="ctr"/>
+          <a:lstStyle/>
+          <a:p>
+            <a:endParaRPr lang="en-US"/>
+          </a:p>
+        </p:txBody>
+      </p:sp>
+      <p:sp>
+        <p:nvSpPr>
+          <p:cNvPr id="5" name="Notes Placeholder 4"/>
+          <p:cNvSpPr>
+            <a:spLocks noGrp="1"/>
+          </p:cNvSpPr>
+          <p:nvPr>
+            <p:ph type="body" sz="quarter" idx="3"/>
+          </p:nvPr>
+        </p:nvSpPr>
+        <p:spPr>
+          <a:xfrm>
+            <a:off x="685800" y="4343400"/>
+            <a:ext cx="5486400" cy="4114800"/>
+          </a:xfrm>
+          <a:prstGeom prst="rect">
+            <a:avLst/>
+          </a:prstGeom>
+        </p:spPr>
+        <p:txBody>
+          <a:bodyPr vert="horz" lIns="91440" tIns="45720" rIns="91440" bIns="45720" rtlCol="0"/>
+          <a:lstStyle/>
+          <a:p>
+            <a:pPr lvl="0"/>
+            <a:r>
+              <a:rPr lang="en-US" smtClean="0"/>
+              <a:t>Click to edit Master text styles</a:t>
+            </a:r>
+          </a:p>
+          <a:p>
+            <a:pPr lvl="1"/>
+            <a:r>
+              <a:rPr lang="en-US" smtClean="0"/>
+              <a:t>Second level</a:t>
+            </a:r>
+          </a:p>
+          <a:p>
+            <a:pPr lvl="2"/>
+            <a:r>
+              <a:rPr lang="en-US" smtClean="0"/>
+              <a:t>Third level</a:t>
+            </a:r>
+          </a:p>
+          <a:p>
+            <a:pPr lvl="3"/>
+            <a:r>
+              <a:rPr lang="en-US" smtClean="0"/>
+              <a:t>Fourth level</a:t>
+            </a:r>
+          </a:p>
+          <a:p>
+            <a:pPr lvl="4"/>
+            <a:r>
+              <a:rPr lang="en-US" smtClean="0"/>
+              <a:t>Fifth level</a:t>
+            </a:r>
+            <a:endParaRPr lang="en-US"/>
+          </a:p>
+        </p:txBody>
+      </p:sp>
+      <p:sp>
+        <p:nvSpPr>
+          <p:cNvPr id="6" name="Footer Placeholder 5"/>
+          <p:cNvSpPr>
+            <a:spLocks noGrp="1"/>
+          </p:cNvSpPr>
+          <p:nvPr>
+            <p:ph type="ftr" sz="quarter" idx="4"/>
+          </p:nvPr>
+        </p:nvSpPr>
+        <p:spPr>
+          <a:xfrm>
+            <a:off x="0" y="8685213"/>
+            <a:ext cx="2971800" cy="457200"/>
+          </a:xfrm>
+          <a:prstGeom prst="rect">
+            <a:avLst/>
+          </a:prstGeom>
+        </p:spPr>
+        <p:txBody>
+          <a:bodyPr vert="horz" lIns="91440" tIns="45720" rIns="91440" bIns="45720" rtlCol="0" anchor="b"/>
+          <a:lstStyle>
+            <a:lvl1pPr algn="l">
+              <a:defRPr sz="1200"/>
+            </a:lvl1pPr>
+          </a:lstStyle>
+          <a:p>
+            <a:endParaRPr lang="en-US"/>
+          </a:p>
+        </p:txBody>
+      </p:sp>
+      <p:sp>
+        <p:nvSpPr>
+          <p:cNvPr id="7" name="Slide Number Placeholder 6"/>
+          <p:cNvSpPr>
+            <a:spLocks noGrp="1"/>
+          </p:cNvSpPr>
+          <p:nvPr>
+            <p:ph type="sldNum" sz="quarter" idx="5"/>
+          </p:nvPr>
+        </p:nvSpPr>
+        <p:spPr>
+          <a:xfrm>
+            <a:off x="3884613" y="8685213"/>
+            <a:ext cx="2971800" cy="457200"/>
+          </a:xfrm>
+          <a:prstGeom prst="rect">
+            <a:avLst/>
+          </a:prstGeom>
+        </p:spPr>
+        <p:txBody>
+          <a:bodyPr vert="horz" lIns="91440" tIns="45720" rIns="91440" bIns="45720" rtlCol="0" anchor="b"/>
+          <a:lstStyle>
+            <a:lvl1pPr algn="r">
+              <a:defRPr sz="1200"/>
+            </a:lvl1pPr>
+          </a:lstStyle>
+          <a:p>
+            <a:fld id="{BB5E49A5-4136-284D-997B-48E1D791AD67}" type="slidenum">
+              <a:rPr lang="en-US" smtClean="0"/>
+              <a:t>‹#›</a:t>
+            </a:fld>
+            <a:endParaRPr lang="en-US"/>
+          </a:p>
+        </p:txBody>
+      </p:sp>
+    </p:spTree>
+    <p:extLst>
+      <p:ext uri="{BB962C8B-B14F-4D97-AF65-F5344CB8AC3E}">
+        <p14:creationId xmlns:p14="http://schemas.microsoft.com/office/powerpoint/2010/main" val="2623252185"/>
+      </p:ext>
+    </p:extLst>
+  </p:cSld>
+  <p:clrMap bg1="lt1" tx1="dk1" bg2="lt2" tx2="dk2" accent1="accent1" accent2="accent2" accent3="accent3" accent4="accent4" accent5="accent5" accent6="accent6" hlink="hlink" folHlink="folHlink"/>
+  <p:notesStyle>
+    <a:lvl1pPr marL="0" algn="l" defTabSz="457200" rtl="0" eaLnBrk="1" latinLnBrk="0" hangingPunct="1">
+      <a:defRPr sz="1200" kern="1200">
+        <a:solidFill>
+          <a:schemeClr val="tx1"/>
+        </a:solidFill>
+        <a:latin typeface="+mn-lt"/>
+        <a:ea typeface="+mn-ea"/>
+        <a:cs typeface="+mn-cs"/>
+      </a:defRPr>
+    </a:lvl1pPr>
+    <a:lvl2pPr marL="457200" algn="l" defTabSz="457200" rtl="0" eaLnBrk="1" latinLnBrk="0" hangingPunct="1">
+      <a:defRPr sz="1200" kern="1200">
+        <a:solidFill>
+          <a:schemeClr val="tx1"/>
+        </a:solidFill>
+        <a:latin typeface="+mn-lt"/>
+        <a:ea typeface="+mn-ea"/>
+        <a:cs typeface="+mn-cs"/>
+      </a:defRPr>
+    </a:lvl2pPr>
+    <a:lvl3pPr marL="914400" algn="l" defTabSz="457200" rtl="0" eaLnBrk="1" latinLnBrk="0" hangingPunct="1">
+      <a:defRPr sz="1200" kern="1200">
+        <a:solidFill>
+          <a:schemeClr val="tx1"/>
+        </a:solidFill>
+        <a:latin typeface="+mn-lt"/>
+        <a:ea typeface="+mn-ea"/>
+        <a:cs typeface="+mn-cs"/>
+      </a:defRPr>
+    </a:lvl3pPr>
+    <a:lvl4pPr marL="1371600" algn="l" defTabSz="457200" rtl="0" eaLnBrk="1" latinLnBrk="0" hangingPunct="1">
+      <a:defRPr sz="1200" kern="1200">
+        <a:solidFill>
+          <a:schemeClr val="tx1"/>
+        </a:solidFill>
+        <a:latin typeface="+mn-lt"/>
+        <a:ea typeface="+mn-ea"/>
+        <a:cs typeface="+mn-cs"/>
+      </a:defRPr>
+    </a:lvl4pPr>
+    <a:lvl5pPr marL="1828800" algn="l" defTabSz="457200" rtl="0" eaLnBrk="1" latinLnBrk="0" hangingPunct="1">
+      <a:defRPr sz="1200" kern="1200">
+        <a:solidFill>
+          <a:schemeClr val="tx1"/>
+        </a:solidFill>
+        <a:latin typeface="+mn-lt"/>
+        <a:ea typeface="+mn-ea"/>
+        <a:cs typeface="+mn-cs"/>
+      </a:defRPr>
+    </a:lvl5pPr>
+    <a:lvl6pPr marL="2286000" algn="l" defTabSz="457200" rtl="0" eaLnBrk="1" latinLnBrk="0" hangingPunct="1">
+      <a:defRPr sz="1200" kern="1200">
+        <a:solidFill>
+          <a:schemeClr val="tx1"/>
+        </a:solidFill>
+        <a:latin typeface="+mn-lt"/>
+        <a:ea typeface="+mn-ea"/>
+        <a:cs typeface="+mn-cs"/>
+      </a:defRPr>
+    </a:lvl6pPr>
+    <a:lvl7pPr marL="2743200" algn="l" defTabSz="457200" rtl="0" eaLnBrk="1" latinLnBrk="0" hangingPunct="1">
+      <a:defRPr sz="1200" kern="1200">
+        <a:solidFill>
+          <a:schemeClr val="tx1"/>
+        </a:solidFill>
+        <a:latin typeface="+mn-lt"/>
+        <a:ea typeface="+mn-ea"/>
+        <a:cs typeface="+mn-cs"/>
+      </a:defRPr>
+    </a:lvl7pPr>
+    <a:lvl8pPr marL="3200400" algn="l" defTabSz="457200" rtl="0" eaLnBrk="1" latinLnBrk="0" hangingPunct="1">
+      <a:defRPr sz="1200" kern="1200">
+        <a:solidFill>
+          <a:schemeClr val="tx1"/>
+        </a:solidFill>
+        <a:latin typeface="+mn-lt"/>
+        <a:ea typeface="+mn-ea"/>
+        <a:cs typeface="+mn-cs"/>
+      </a:defRPr>
+    </a:lvl8pPr>
+    <a:lvl9pPr marL="3657600" algn="l" defTabSz="457200" rtl="0" eaLnBrk="1" latinLnBrk="0" hangingPunct="1">
+      <a:defRPr sz="1200" kern="1200">
+        <a:solidFill>
+          <a:schemeClr val="tx1"/>
+        </a:solidFill>
+        <a:latin typeface="+mn-lt"/>
+        <a:ea typeface="+mn-ea"/>
+        <a:cs typeface="+mn-cs"/>
+      </a:defRPr>
+    </a:lvl9pPr>
+  </p:notesStyle>
+</p:notesMaster>
+</file>
+
+<file path=ppt/notesSlides/notesSlide1.xml><?xml version="1.0" encoding="utf-8"?>
+<p:notes xmlns:a="http://schemas.openxmlformats.org/drawingml/2006/main" xmlns:p="http://schemas.openxmlformats.org/presentationml/2006/main" xmlns:r="http://schemas.openxmlformats.org/officeDocument/2006/relationships">
+  <p:cSld>
+    <p:spTree>
+      <p:nvGrpSpPr>
+        <p:cNvPr id="1" name=""/>
+        <p:cNvGrpSpPr/>
+        <p:nvPr/>
+      </p:nvGrpSpPr>
+      <p:grpSpPr>
+        <a:xfrm>
+          <a:off x="0" y="0"/>
+          <a:ext cx="0" cy="0"/>
+          <a:chOff x="0" y="0"/>
+          <a:chExt cx="0" cy="0"/>
+        </a:xfrm>
+      </p:grpSpPr>
+      <p:sp>
+        <p:nvSpPr>
+          <p:cNvPr id="2" name="Slide Image Placeholder 1"/>
+          <p:cNvSpPr>
+            <a:spLocks noGrp="1"/>
+          </p:cNvSpPr>
+          <p:nvPr>
+            <p:ph type="sldImg" idx="2"/>
+          </p:nvPr>
+        </p:nvSpPr>
+        <p:spPr/>
+      </p:sp>
+      <p:sp>
+        <p:nvSpPr>
+          <p:cNvPr id="3" name="Notes Placeholder 2"/>
+          <p:cNvSpPr>
+            <a:spLocks noGrp="1"/>
+          </p:cNvSpPr>
+          <p:nvPr>
+            <p:ph type="body" idx="3" sz="quarter"/>
+          </p:nvPr>
+        </p:nvSpPr>
+        <p:spPr/>
+        <p:txBody>
+          <a:bodyPr/>
+          <a:lstStyle/>
+          <a:p/>
+        </p:txBody>
+      </p:sp>
+      <p:sp>
+        <p:nvSpPr>
+          <p:cNvPr id="4" name="Slide Number Placeholder 3"/>
+          <p:cNvSpPr>
+            <a:spLocks noGrp="1"/>
+          </p:cNvSpPr>
+          <p:nvPr>
+            <p:ph type="sldNum" idx="5" sz="quarter"/>
+          </p:nvPr>
+        </p:nvSpPr>
+        <p:spPr/>
+      </p:sp>
+    </p:spTree>
+  </p:cSld>
+  <p:clrMapOvr>
+    <a:masterClrMapping/>
+  </p:clrMapOvr>
+</p:notes>
+</file>
+
+<file path=ppt/notesSlides/notesSlide2.xml><?xml version="1.0" encoding="utf-8"?>
+<p:notes xmlns:a="http://schemas.openxmlformats.org/drawingml/2006/main" xmlns:p="http://schemas.openxmlformats.org/presentationml/2006/main" xmlns:r="http://schemas.openxmlformats.org/officeDocument/2006/relationships">
+  <p:cSld>
+    <p:spTree>
+      <p:nvGrpSpPr>
+        <p:cNvPr id="1" name=""/>
+        <p:cNvGrpSpPr/>
+        <p:nvPr/>
+      </p:nvGrpSpPr>
+      <p:grpSpPr>
+        <a:xfrm>
+          <a:off x="0" y="0"/>
+          <a:ext cx="0" cy="0"/>
+          <a:chOff x="0" y="0"/>
+          <a:chExt cx="0" cy="0"/>
+        </a:xfrm>
+      </p:grpSpPr>
+      <p:sp>
+        <p:nvSpPr>
+          <p:cNvPr id="2" name="Slide Image Placeholder 1"/>
+          <p:cNvSpPr>
+            <a:spLocks noGrp="1"/>
+          </p:cNvSpPr>
+          <p:nvPr>
+            <p:ph type="sldImg" idx="2"/>
+          </p:nvPr>
+        </p:nvSpPr>
+        <p:spPr/>
+      </p:sp>
+      <p:sp>
+        <p:nvSpPr>
+          <p:cNvPr id="3" name="Notes Placeholder 2"/>
+          <p:cNvSpPr>
+            <a:spLocks noGrp="1"/>
+          </p:cNvSpPr>
+          <p:nvPr>
+            <p:ph type="body" idx="3" sz="quarter"/>
+          </p:nvPr>
+        </p:nvSpPr>
+        <p:spPr/>
+        <p:txBody>
+          <a:bodyPr/>
+          <a:lstStyle/>
+          <a:p/>
+        </p:txBody>
+      </p:sp>
+      <p:sp>
+        <p:nvSpPr>
+          <p:cNvPr id="4" name="Slide Number Placeholder 3"/>
+          <p:cNvSpPr>
+            <a:spLocks noGrp="1"/>
+          </p:cNvSpPr>
+          <p:nvPr>
+            <p:ph type="sldNum" idx="5" sz="quarter"/>
+          </p:nvPr>
+        </p:nvSpPr>
+        <p:spPr/>
+      </p:sp>
+    </p:spTree>
+  </p:cSld>
+  <p:clrMapOvr>
+    <a:masterClrMapping/>
+  </p:clrMapOvr>
+</p:notes>
+</file>
+
+<file path=ppt/notesSlides/notesSlide3.xml><?xml version="1.0" encoding="utf-8"?>
+<p:notes xmlns:a="http://schemas.openxmlformats.org/drawingml/2006/main" xmlns:p="http://schemas.openxmlformats.org/presentationml/2006/main" xmlns:r="http://schemas.openxmlformats.org/officeDocument/2006/relationships">
+  <p:cSld>
+    <p:spTree>
+      <p:nvGrpSpPr>
+        <p:cNvPr id="1" name=""/>
+        <p:cNvGrpSpPr/>
+        <p:nvPr/>
+      </p:nvGrpSpPr>
+      <p:grpSpPr>
+        <a:xfrm>
+          <a:off x="0" y="0"/>
+          <a:ext cx="0" cy="0"/>
+          <a:chOff x="0" y="0"/>
+          <a:chExt cx="0" cy="0"/>
+        </a:xfrm>
+      </p:grpSpPr>
+      <p:sp>
+        <p:nvSpPr>
+          <p:cNvPr id="2" name="Slide Image Placeholder 1"/>
+          <p:cNvSpPr>
+            <a:spLocks noGrp="1"/>
+          </p:cNvSpPr>
+          <p:nvPr>
+            <p:ph type="sldImg" idx="2"/>
+          </p:nvPr>
+        </p:nvSpPr>
+        <p:spPr/>
+      </p:sp>
+      <p:sp>
+        <p:nvSpPr>
+          <p:cNvPr id="3" name="Notes Placeholder 2"/>
+          <p:cNvSpPr>
+            <a:spLocks noGrp="1"/>
+          </p:cNvSpPr>
+          <p:nvPr>
+            <p:ph type="body" idx="3" sz="quarter"/>
+          </p:nvPr>
+        </p:nvSpPr>
+        <p:spPr/>
+        <p:txBody>
+          <a:bodyPr/>
+          <a:lstStyle/>
+          <a:p/>
+        </p:txBody>
+      </p:sp>
+      <p:sp>
+        <p:nvSpPr>
+          <p:cNvPr id="4" name="Slide Number Placeholder 3"/>
+          <p:cNvSpPr>
+            <a:spLocks noGrp="1"/>
+          </p:cNvSpPr>
+          <p:nvPr>
+            <p:ph type="sldNum" idx="5" sz="quarter"/>
+          </p:nvPr>
+        </p:nvSpPr>
+        <p:spPr/>
+      </p:sp>
+    </p:spTree>
+  </p:cSld>
+  <p:clrMapOvr>
+    <a:masterClrMapping/>
+  </p:clrMapOvr>
+</p:notes>
+</file>
+
+<file path=ppt/notesSlides/notesSlide4.xml><?xml version="1.0" encoding="utf-8"?>
+<p:notes xmlns:a="http://schemas.openxmlformats.org/drawingml/2006/main" xmlns:p="http://schemas.openxmlformats.org/presentationml/2006/main" xmlns:r="http://schemas.openxmlformats.org/officeDocument/2006/relationships">
+  <p:cSld>
+    <p:spTree>
+      <p:nvGrpSpPr>
+        <p:cNvPr id="1" name=""/>
+        <p:cNvGrpSpPr/>
+        <p:nvPr/>
+      </p:nvGrpSpPr>
+      <p:grpSpPr>
+        <a:xfrm>
+          <a:off x="0" y="0"/>
+          <a:ext cx="0" cy="0"/>
+          <a:chOff x="0" y="0"/>
+          <a:chExt cx="0" cy="0"/>
+        </a:xfrm>
+      </p:grpSpPr>
+      <p:sp>
+        <p:nvSpPr>
+          <p:cNvPr id="2" name="Slide Image Placeholder 1"/>
+          <p:cNvSpPr>
+            <a:spLocks noGrp="1"/>
+          </p:cNvSpPr>
+          <p:nvPr>
+            <p:ph type="sldImg" idx="2"/>
+          </p:nvPr>
+        </p:nvSpPr>
+        <p:spPr/>
+      </p:sp>
+      <p:sp>
+        <p:nvSpPr>
+          <p:cNvPr id="3" name="Notes Placeholder 2"/>
+          <p:cNvSpPr>
+            <a:spLocks noGrp="1"/>
+          </p:cNvSpPr>
+          <p:nvPr>
+            <p:ph type="body" idx="3" sz="quarter"/>
+          </p:nvPr>
+        </p:nvSpPr>
+        <p:spPr/>
+        <p:txBody>
+          <a:bodyPr/>
+          <a:lstStyle/>
+          <a:p/>
+        </p:txBody>
+      </p:sp>
+      <p:sp>
+        <p:nvSpPr>
+          <p:cNvPr id="4" name="Slide Number Placeholder 3"/>
+          <p:cNvSpPr>
+            <a:spLocks noGrp="1"/>
+          </p:cNvSpPr>
+          <p:nvPr>
+            <p:ph type="sldNum" idx="5" sz="quarter"/>
+          </p:nvPr>
+        </p:nvSpPr>
+        <p:spPr/>
+      </p:sp>
+    </p:spTree>
+  </p:cSld>
+  <p:clrMapOvr>
+    <a:masterClrMapping/>
+  </p:clrMapOvr>
+</p:notes>
+</file>
+
+<file path=ppt/notesSlides/notesSlide5.xml><?xml version="1.0" encoding="utf-8"?>
+<p:notes xmlns:a="http://schemas.openxmlformats.org/drawingml/2006/main" xmlns:p="http://schemas.openxmlformats.org/presentationml/2006/main" xmlns:r="http://schemas.openxmlformats.org/officeDocument/2006/relationships">
+  <p:cSld>
+    <p:spTree>
+      <p:nvGrpSpPr>
+        <p:cNvPr id="1" name=""/>
+        <p:cNvGrpSpPr/>
+        <p:nvPr/>
+      </p:nvGrpSpPr>
+      <p:grpSpPr>
+        <a:xfrm>
+          <a:off x="0" y="0"/>
+          <a:ext cx="0" cy="0"/>
+          <a:chOff x="0" y="0"/>
+          <a:chExt cx="0" cy="0"/>
+        </a:xfrm>
+      </p:grpSpPr>
+      <p:sp>
+        <p:nvSpPr>
+          <p:cNvPr id="2" name="Slide Image Placeholder 1"/>
+          <p:cNvSpPr>
+            <a:spLocks noGrp="1"/>
+          </p:cNvSpPr>
+          <p:nvPr>
+            <p:ph type="sldImg" idx="2"/>
+          </p:nvPr>
+        </p:nvSpPr>
+        <p:spPr/>
+      </p:sp>
+      <p:sp>
+        <p:nvSpPr>
+          <p:cNvPr id="3" name="Notes Placeholder 2"/>
+          <p:cNvSpPr>
+            <a:spLocks noGrp="1"/>
+          </p:cNvSpPr>
+          <p:nvPr>
+            <p:ph type="body" idx="3" sz="quarter"/>
+          </p:nvPr>
+        </p:nvSpPr>
+        <p:spPr/>
+        <p:txBody>
+          <a:bodyPr/>
+          <a:lstStyle/>
+          <a:p/>
+        </p:txBody>
+      </p:sp>
+      <p:sp>
+        <p:nvSpPr>
+          <p:cNvPr id="4" name="Slide Number Placeholder 3"/>
+          <p:cNvSpPr>
+            <a:spLocks noGrp="1"/>
+          </p:cNvSpPr>
+          <p:nvPr>
+            <p:ph type="sldNum" idx="5" sz="quarter"/>
+          </p:nvPr>
+        </p:nvSpPr>
+        <p:spPr/>
+      </p:sp>
+    </p:spTree>
+  </p:cSld>
+  <p:clrMapOvr>
+    <a:masterClrMapping/>
+  </p:clrMapOvr>
+</p:notes>
+</file>
+
+<file path=ppt/notesSlides/notesSlide6.xml><?xml version="1.0" encoding="utf-8"?>
+<p:notes xmlns:a="http://schemas.openxmlformats.org/drawingml/2006/main" xmlns:p="http://schemas.openxmlformats.org/presentationml/2006/main" xmlns:r="http://schemas.openxmlformats.org/officeDocument/2006/relationships">
+  <p:cSld>
+    <p:spTree>
+      <p:nvGrpSpPr>
+        <p:cNvPr id="1" name=""/>
+        <p:cNvGrpSpPr/>
+        <p:nvPr/>
+      </p:nvGrpSpPr>
+      <p:grpSpPr>
+        <a:xfrm>
+          <a:off x="0" y="0"/>
+          <a:ext cx="0" cy="0"/>
+          <a:chOff x="0" y="0"/>
+          <a:chExt cx="0" cy="0"/>
+        </a:xfrm>
+      </p:grpSpPr>
+      <p:sp>
+        <p:nvSpPr>
+          <p:cNvPr id="2" name="Slide Image Placeholder 1"/>
+          <p:cNvSpPr>
+            <a:spLocks noGrp="1"/>
+          </p:cNvSpPr>
+          <p:nvPr>
+            <p:ph type="sldImg" idx="2"/>
+          </p:nvPr>
+        </p:nvSpPr>
+        <p:spPr/>
+      </p:sp>
+      <p:sp>
+        <p:nvSpPr>
+          <p:cNvPr id="3" name="Notes Placeholder 2"/>
+          <p:cNvSpPr>
+            <a:spLocks noGrp="1"/>
+          </p:cNvSpPr>
+          <p:nvPr>
+            <p:ph type="body" idx="3" sz="quarter"/>
+          </p:nvPr>
+        </p:nvSpPr>
+        <p:spPr/>
+        <p:txBody>
+          <a:bodyPr/>
+          <a:lstStyle/>
+          <a:p/>
+        </p:txBody>
+      </p:sp>
+      <p:sp>
+        <p:nvSpPr>
+          <p:cNvPr id="4" name="Slide Number Placeholder 3"/>
+          <p:cNvSpPr>
+            <a:spLocks noGrp="1"/>
+          </p:cNvSpPr>
+          <p:nvPr>
+            <p:ph type="sldNum" idx="5" sz="quarter"/>
+          </p:nvPr>
+        </p:nvSpPr>
+        <p:spPr/>
+      </p:sp>
+    </p:spTree>
+  </p:cSld>
+  <p:clrMapOvr>
+    <a:masterClrMapping/>
+  </p:clrMapOvr>
+</p:notes>
+</file>
+
+<file path=ppt/notesSlides/notesSlide7.xml><?xml version="1.0" encoding="utf-8"?>
+<p:notes xmlns:a="http://schemas.openxmlformats.org/drawingml/2006/main" xmlns:p="http://schemas.openxmlformats.org/presentationml/2006/main" xmlns:r="http://schemas.openxmlformats.org/officeDocument/2006/relationships">
+  <p:cSld>
+    <p:spTree>
+      <p:nvGrpSpPr>
+        <p:cNvPr id="1" name=""/>
+        <p:cNvGrpSpPr/>
+        <p:nvPr/>
+      </p:nvGrpSpPr>
+      <p:grpSpPr>
+        <a:xfrm>
+          <a:off x="0" y="0"/>
+          <a:ext cx="0" cy="0"/>
+          <a:chOff x="0" y="0"/>
+          <a:chExt cx="0" cy="0"/>
+        </a:xfrm>
+      </p:grpSpPr>
+      <p:sp>
+        <p:nvSpPr>
+          <p:cNvPr id="2" name="Slide Image Placeholder 1"/>
+          <p:cNvSpPr>
+            <a:spLocks noGrp="1"/>
+          </p:cNvSpPr>
+          <p:nvPr>
+            <p:ph type="sldImg" idx="2"/>
+          </p:nvPr>
+        </p:nvSpPr>
+        <p:spPr/>
+      </p:sp>
+      <p:sp>
+        <p:nvSpPr>
+          <p:cNvPr id="3" name="Notes Placeholder 2"/>
+          <p:cNvSpPr>
+            <a:spLocks noGrp="1"/>
+          </p:cNvSpPr>
+          <p:nvPr>
+            <p:ph type="body" idx="3" sz="quarter"/>
+          </p:nvPr>
+        </p:nvSpPr>
+        <p:spPr/>
+        <p:txBody>
+          <a:bodyPr/>
+          <a:lstStyle/>
+          <a:p/>
+        </p:txBody>
+      </p:sp>
+      <p:sp>
+        <p:nvSpPr>
+          <p:cNvPr id="4" name="Slide Number Placeholder 3"/>
+          <p:cNvSpPr>
+            <a:spLocks noGrp="1"/>
+          </p:cNvSpPr>
+          <p:nvPr>
+            <p:ph type="sldNum" idx="5" sz="quarter"/>
+          </p:nvPr>
+        </p:nvSpPr>
+        <p:spPr/>
+      </p:sp>
+    </p:spTree>
+  </p:cSld>
+  <p:clrMapOvr>
+    <a:masterClrMapping/>
+  </p:clrMapOvr>
+</p:notes>
+</file>
+
+<file path=ppt/notesSlides/notesSlide8.xml><?xml version="1.0" encoding="utf-8"?>
+<p:notes xmlns:a="http://schemas.openxmlformats.org/drawingml/2006/main" xmlns:p="http://schemas.openxmlformats.org/presentationml/2006/main" xmlns:r="http://schemas.openxmlformats.org/officeDocument/2006/relationships">
+  <p:cSld>
+    <p:spTree>
+      <p:nvGrpSpPr>
+        <p:cNvPr id="1" name=""/>
+        <p:cNvGrpSpPr/>
+        <p:nvPr/>
+      </p:nvGrpSpPr>
+      <p:grpSpPr>
+        <a:xfrm>
+          <a:off x="0" y="0"/>
+          <a:ext cx="0" cy="0"/>
+          <a:chOff x="0" y="0"/>
+          <a:chExt cx="0" cy="0"/>
+        </a:xfrm>
+      </p:grpSpPr>
+      <p:sp>
+        <p:nvSpPr>
+          <p:cNvPr id="2" name="Slide Image Placeholder 1"/>
+          <p:cNvSpPr>
+            <a:spLocks noGrp="1"/>
+          </p:cNvSpPr>
+          <p:nvPr>
+            <p:ph type="sldImg" idx="2"/>
+          </p:nvPr>
+        </p:nvSpPr>
+        <p:spPr/>
+      </p:sp>
+      <p:sp>
+        <p:nvSpPr>
+          <p:cNvPr id="3" name="Notes Placeholder 2"/>
+          <p:cNvSpPr>
+            <a:spLocks noGrp="1"/>
+          </p:cNvSpPr>
+          <p:nvPr>
+            <p:ph type="body" idx="3" sz="quarter"/>
+          </p:nvPr>
+        </p:nvSpPr>
+        <p:spPr/>
+        <p:txBody>
+          <a:bodyPr/>
+          <a:lstStyle/>
+          <a:p/>
+        </p:txBody>
+      </p:sp>
+      <p:sp>
+        <p:nvSpPr>
+          <p:cNvPr id="4" name="Slide Number Placeholder 3"/>
+          <p:cNvSpPr>
+            <a:spLocks noGrp="1"/>
+          </p:cNvSpPr>
+          <p:nvPr>
+            <p:ph type="sldNum" idx="5" sz="quarter"/>
+          </p:nvPr>
+        </p:nvSpPr>
+        <p:spPr/>
+      </p:sp>
+    </p:spTree>
+  </p:cSld>
+  <p:clrMapOvr>
+    <a:masterClrMapping/>
+  </p:clrMapOvr>
+</p:notes>
 </file>
 
 <file path=ppt/slideLayouts/slideLayout1.xml><?xml version="1.0" encoding="utf-8"?>
@@ -3257,7 +4135,7 @@
               </a:defRPr>
             </a:pPr>
             <a:r>
-              <a:t>SESIÓN 288</a:t>
+              <a:t>H6.10</a:t>
             </a:r>
           </a:p>
         </p:txBody>
@@ -3692,7 +4570,7 @@
               </a:defRPr>
             </a:pPr>
             <a:r>
-              <a:t>MiniJarvis · 1.º DAW · Sesión 288 · H6</a:t>
+              <a:t>MiniJarvis · 1.º DAW · H6.10 · H6</a:t>
             </a:r>
           </a:p>
         </p:txBody>
@@ -4109,7 +4987,7 @@
               </a:defRPr>
             </a:pPr>
             <a:r>
-              <a:t>MiniJarvis · 1.º DAW · Sesión 288 · H6</a:t>
+              <a:t>MiniJarvis · 1.º DAW · H6.10 · H6</a:t>
             </a:r>
           </a:p>
         </p:txBody>
@@ -5054,7 +5932,7 @@
               </a:defRPr>
             </a:pPr>
             <a:r>
-              <a:t>MiniJarvis · 1.º DAW · Sesión 288 · H6</a:t>
+              <a:t>MiniJarvis · 1.º DAW · H6.10 · H6</a:t>
             </a:r>
           </a:p>
         </p:txBody>
@@ -5547,7 +6425,7 @@
               </a:defRPr>
             </a:pPr>
             <a:r>
-              <a:t>MiniJarvis · 1.º DAW · Sesión 288 · H6</a:t>
+              <a:t>MiniJarvis · 1.º DAW · H6.10 · H6</a:t>
             </a:r>
           </a:p>
         </p:txBody>
@@ -6036,7 +6914,7 @@
               </a:defRPr>
             </a:pPr>
             <a:r>
-              <a:t>MiniJarvis · 1.º DAW · Sesión 288 · H6</a:t>
+              <a:t>MiniJarvis · 1.º DAW · H6.10 · H6</a:t>
             </a:r>
           </a:p>
         </p:txBody>
@@ -6696,7 +7574,7 @@
               </a:defRPr>
             </a:pPr>
             <a:r>
-              <a:t>MiniJarvis · 1.º DAW · Sesión 288 · H6</a:t>
+              <a:t>MiniJarvis · 1.º DAW · H6.10 · H6</a:t>
             </a:r>
           </a:p>
         </p:txBody>
@@ -7447,7 +8325,7 @@
               </a:defRPr>
             </a:pPr>
             <a:r>
-              <a:t>MiniJarvis · 1.º DAW · Sesión 288 · H6</a:t>
+              <a:t>MiniJarvis · 1.º DAW · H6.10 · H6</a:t>
             </a:r>
           </a:p>
         </p:txBody>
@@ -7931,4 +8809,324 @@
   </a:objectDefaults>
   <a:extraClrSchemeLst/>
 </a:theme>
+</file>
+
+<file path=ppt/theme/theme2.xml><?xml version="1.0" encoding="utf-8"?>
+<a:theme xmlns:a="http://schemas.openxmlformats.org/drawingml/2006/main" name="Office Theme">
+  <a:themeElements>
+    <a:clrScheme name="Office">
+      <a:dk1>
+        <a:sysClr val="windowText" lastClr="000000"/>
+      </a:dk1>
+      <a:lt1>
+        <a:sysClr val="window" lastClr="FFFFFF"/>
+      </a:lt1>
+      <a:dk2>
+        <a:srgbClr val="1F497D"/>
+      </a:dk2>
+      <a:lt2>
+        <a:srgbClr val="EEECE1"/>
+      </a:lt2>
+      <a:accent1>
+        <a:srgbClr val="4F81BD"/>
+      </a:accent1>
+      <a:accent2>
+        <a:srgbClr val="C0504D"/>
+      </a:accent2>
+      <a:accent3>
+        <a:srgbClr val="9BBB59"/>
+      </a:accent3>
+      <a:accent4>
+        <a:srgbClr val="8064A2"/>
+      </a:accent4>
+      <a:accent5>
+        <a:srgbClr val="4BACC6"/>
+      </a:accent5>
+      <a:accent6>
+        <a:srgbClr val="F79646"/>
+      </a:accent6>
+      <a:hlink>
+        <a:srgbClr val="0000FF"/>
+      </a:hlink>
+      <a:folHlink>
+        <a:srgbClr val="800080"/>
+      </a:folHlink>
+    </a:clrScheme>
+    <a:fontScheme name="Office">
+      <a:majorFont>
+        <a:latin typeface="Calibri"/>
+        <a:ea typeface=""/>
+        <a:cs typeface=""/>
+        <a:font script="Jpan" typeface="ＭＳ Ｐゴシック"/>
+        <a:font script="Hang" typeface="맑은 고딕"/>
+        <a:font script="Hans" typeface="宋体"/>
+        <a:font script="Hant" typeface="新細明體"/>
+        <a:font script="Arab" typeface="Times New Roman"/>
+        <a:font script="Hebr" typeface="Times New Roman"/>
+        <a:font script="Thai" typeface="Angsana New"/>
+        <a:font script="Ethi" typeface="Nyala"/>
+        <a:font script="Beng" typeface="Vrinda"/>
+        <a:font script="Gujr" typeface="Shruti"/>
+        <a:font script="Khmr" typeface="MoolBoran"/>
+        <a:font script="Knda" typeface="Tunga"/>
+        <a:font script="Guru" typeface="Raavi"/>
+        <a:font script="Cans" typeface="Euphemia"/>
+        <a:font script="Cher" typeface="Plantagenet Cherokee"/>
+        <a:font script="Yiii" typeface="Microsoft Yi Baiti"/>
+        <a:font script="Tibt" typeface="Microsoft Himalaya"/>
+        <a:font script="Thaa" typeface="MV Boli"/>
+        <a:font script="Deva" typeface="Mangal"/>
+        <a:font script="Telu" typeface="Gautami"/>
+        <a:font script="Taml" typeface="Latha"/>
+        <a:font script="Syrc" typeface="Estrangelo Edessa"/>
+        <a:font script="Orya" typeface="Kalinga"/>
+        <a:font script="Mlym" typeface="Kartika"/>
+        <a:font script="Laoo" typeface="DokChampa"/>
+        <a:font script="Sinh" typeface="Iskoola Pota"/>
+        <a:font script="Mong" typeface="Mongolian Baiti"/>
+        <a:font script="Viet" typeface="Times New Roman"/>
+        <a:font script="Uigh" typeface="Microsoft Uighur"/>
+        <a:font script="Geor" typeface="Sylfaen"/>
+      </a:majorFont>
+      <a:minorFont>
+        <a:latin typeface="Calibri"/>
+        <a:ea typeface=""/>
+        <a:cs typeface=""/>
+        <a:font script="Jpan" typeface="ＭＳ Ｐゴシック"/>
+        <a:font script="Hang" typeface="맑은 고딕"/>
+        <a:font script="Hans" typeface="宋体"/>
+        <a:font script="Hant" typeface="新細明體"/>
+        <a:font script="Arab" typeface="Arial"/>
+        <a:font script="Hebr" typeface="Arial"/>
+        <a:font script="Thai" typeface="Cordia New"/>
+        <a:font script="Ethi" typeface="Nyala"/>
+        <a:font script="Beng" typeface="Vrinda"/>
+        <a:font script="Gujr" typeface="Shruti"/>
+        <a:font script="Khmr" typeface="DaunPenh"/>
+        <a:font script="Knda" typeface="Tunga"/>
+        <a:font script="Guru" typeface="Raavi"/>
+        <a:font script="Cans" typeface="Euphemia"/>
+        <a:font script="Cher" typeface="Plantagenet Cherokee"/>
+        <a:font script="Yiii" typeface="Microsoft Yi Baiti"/>
+        <a:font script="Tibt" typeface="Microsoft Himalaya"/>
+        <a:font script="Thaa" typeface="MV Boli"/>
+        <a:font script="Deva" typeface="Mangal"/>
+        <a:font script="Telu" typeface="Gautami"/>
+        <a:font script="Taml" typeface="Latha"/>
+        <a:font script="Syrc" typeface="Estrangelo Edessa"/>
+        <a:font script="Orya" typeface="Kalinga"/>
+        <a:font script="Mlym" typeface="Kartika"/>
+        <a:font script="Laoo" typeface="DokChampa"/>
+        <a:font script="Sinh" typeface="Iskoola Pota"/>
+        <a:font script="Mong" typeface="Mongolian Baiti"/>
+        <a:font script="Viet" typeface="Arial"/>
+        <a:font script="Uigh" typeface="Microsoft Uighur"/>
+        <a:font script="Geor" typeface="Sylfaen"/>
+      </a:minorFont>
+    </a:fontScheme>
+    <a:fmtScheme name="Office">
+      <a:fillStyleLst>
+        <a:solidFill>
+          <a:schemeClr val="phClr"/>
+        </a:solidFill>
+        <a:gradFill rotWithShape="1">
+          <a:gsLst>
+            <a:gs pos="0">
+              <a:schemeClr val="phClr">
+                <a:tint val="50000"/>
+                <a:satMod val="300000"/>
+              </a:schemeClr>
+            </a:gs>
+            <a:gs pos="35000">
+              <a:schemeClr val="phClr">
+                <a:tint val="37000"/>
+                <a:satMod val="300000"/>
+              </a:schemeClr>
+            </a:gs>
+            <a:gs pos="100000">
+              <a:schemeClr val="phClr">
+                <a:tint val="15000"/>
+                <a:satMod val="350000"/>
+              </a:schemeClr>
+            </a:gs>
+          </a:gsLst>
+          <a:lin ang="16200000" scaled="1"/>
+        </a:gradFill>
+        <a:gradFill rotWithShape="1">
+          <a:gsLst>
+            <a:gs pos="0">
+              <a:schemeClr val="phClr">
+                <a:tint val="100000"/>
+                <a:shade val="100000"/>
+                <a:satMod val="130000"/>
+              </a:schemeClr>
+            </a:gs>
+            <a:gs pos="100000">
+              <a:schemeClr val="phClr">
+                <a:tint val="50000"/>
+                <a:shade val="100000"/>
+                <a:satMod val="350000"/>
+              </a:schemeClr>
+            </a:gs>
+          </a:gsLst>
+          <a:lin ang="16200000" scaled="0"/>
+        </a:gradFill>
+      </a:fillStyleLst>
+      <a:lnStyleLst>
+        <a:ln w="9525" cap="flat" cmpd="sng" algn="ctr">
+          <a:solidFill>
+            <a:schemeClr val="phClr">
+              <a:shade val="95000"/>
+              <a:satMod val="105000"/>
+            </a:schemeClr>
+          </a:solidFill>
+          <a:prstDash val="solid"/>
+        </a:ln>
+        <a:ln w="25400" cap="flat" cmpd="sng" algn="ctr">
+          <a:solidFill>
+            <a:schemeClr val="phClr"/>
+          </a:solidFill>
+          <a:prstDash val="solid"/>
+        </a:ln>
+        <a:ln w="38100" cap="flat" cmpd="sng" algn="ctr">
+          <a:solidFill>
+            <a:schemeClr val="phClr"/>
+          </a:solidFill>
+          <a:prstDash val="solid"/>
+        </a:ln>
+      </a:lnStyleLst>
+      <a:effectStyleLst>
+        <a:effectStyle>
+          <a:effectLst>
+            <a:outerShdw blurRad="40000" dist="20000" dir="5400000" rotWithShape="0">
+              <a:srgbClr val="000000">
+                <a:alpha val="38000"/>
+              </a:srgbClr>
+            </a:outerShdw>
+          </a:effectLst>
+        </a:effectStyle>
+        <a:effectStyle>
+          <a:effectLst>
+            <a:outerShdw blurRad="40000" dist="23000" dir="5400000" rotWithShape="0">
+              <a:srgbClr val="000000">
+                <a:alpha val="35000"/>
+              </a:srgbClr>
+            </a:outerShdw>
+          </a:effectLst>
+        </a:effectStyle>
+        <a:effectStyle>
+          <a:effectLst>
+            <a:outerShdw blurRad="40000" dist="23000" dir="5400000" rotWithShape="0">
+              <a:srgbClr val="000000">
+                <a:alpha val="35000"/>
+              </a:srgbClr>
+            </a:outerShdw>
+          </a:effectLst>
+          <a:scene3d>
+            <a:camera prst="orthographicFront">
+              <a:rot lat="0" lon="0" rev="0"/>
+            </a:camera>
+            <a:lightRig rig="threePt" dir="t">
+              <a:rot lat="0" lon="0" rev="1200000"/>
+            </a:lightRig>
+          </a:scene3d>
+          <a:sp3d>
+            <a:bevelT w="63500" h="25400"/>
+          </a:sp3d>
+        </a:effectStyle>
+      </a:effectStyleLst>
+      <a:bgFillStyleLst>
+        <a:solidFill>
+          <a:schemeClr val="phClr"/>
+        </a:solidFill>
+        <a:gradFill rotWithShape="1">
+          <a:gsLst>
+            <a:gs pos="0">
+              <a:schemeClr val="phClr">
+                <a:tint val="40000"/>
+                <a:satMod val="350000"/>
+              </a:schemeClr>
+            </a:gs>
+            <a:gs pos="40000">
+              <a:schemeClr val="phClr">
+                <a:tint val="45000"/>
+                <a:shade val="99000"/>
+                <a:satMod val="350000"/>
+              </a:schemeClr>
+            </a:gs>
+            <a:gs pos="100000">
+              <a:schemeClr val="phClr">
+                <a:shade val="20000"/>
+                <a:satMod val="255000"/>
+              </a:schemeClr>
+            </a:gs>
+          </a:gsLst>
+          <a:path path="circle">
+            <a:fillToRect l="50000" t="-80000" r="50000" b="180000"/>
+          </a:path>
+        </a:gradFill>
+        <a:gradFill rotWithShape="1">
+          <a:gsLst>
+            <a:gs pos="0">
+              <a:schemeClr val="phClr">
+                <a:tint val="80000"/>
+                <a:satMod val="300000"/>
+              </a:schemeClr>
+            </a:gs>
+            <a:gs pos="100000">
+              <a:schemeClr val="phClr">
+                <a:shade val="30000"/>
+                <a:satMod val="200000"/>
+              </a:schemeClr>
+            </a:gs>
+          </a:gsLst>
+          <a:path path="circle">
+            <a:fillToRect l="50000" t="50000" r="50000" b="50000"/>
+          </a:path>
+        </a:gradFill>
+      </a:bgFillStyleLst>
+    </a:fmtScheme>
+  </a:themeElements>
+  <a:objectDefaults>
+    <a:spDef>
+      <a:spPr/>
+      <a:bodyPr/>
+      <a:lstStyle/>
+      <a:style>
+        <a:lnRef idx="1">
+          <a:schemeClr val="accent1"/>
+        </a:lnRef>
+        <a:fillRef idx="3">
+          <a:schemeClr val="accent1"/>
+        </a:fillRef>
+        <a:effectRef idx="2">
+          <a:schemeClr val="accent1"/>
+        </a:effectRef>
+        <a:fontRef idx="minor">
+          <a:schemeClr val="lt1"/>
+        </a:fontRef>
+      </a:style>
+    </a:spDef>
+    <a:lnDef>
+      <a:spPr/>
+      <a:bodyPr/>
+      <a:lstStyle/>
+      <a:style>
+        <a:lnRef idx="2">
+          <a:schemeClr val="accent1"/>
+        </a:lnRef>
+        <a:fillRef idx="0">
+          <a:schemeClr val="accent1"/>
+        </a:fillRef>
+        <a:effectRef idx="1">
+          <a:schemeClr val="accent1"/>
+        </a:effectRef>
+        <a:fontRef idx="minor">
+          <a:schemeClr val="tx1"/>
+        </a:fontRef>
+      </a:style>
+    </a:lnDef>
+  </a:objectDefaults>
+  <a:extraClrSchemeLst/>
+</a:theme>
 </file>